--- a/exports/pptx/lessons/middle-module-03-ayurveda-good-health/day-06-ahara.pptx
+++ b/exports/pptx/lessons/middle-module-03-ayurveda-good-health/day-06-ahara.pptx
@@ -3982,8 +3982,8 @@
         </p:nvSpPr>
         <p:spPr>
           <a:xfrm>
-            <a:off x="634901" y="3221980"/>
-            <a:ext cx="8102798" cy="487561"/>
+            <a:off x="406301" y="1254323"/>
+            <a:ext cx="8498026" cy="213271"/>
           </a:xfrm>
           <a:prstGeom prst="rect">
             <a:avLst/>
@@ -3995,46 +3995,28 @@
           <a:bodyPr wrap="square" lIns="0" tIns="0" rIns="0" bIns="0" rtlCol="0" anchor="t"/>
           <a:lstStyle/>
           <a:p>
-            <a:pPr algn="l" marL="342900" indent="-342900">
-              <a:lnSpc>
-                <a:spcPts val="1620"/>
-              </a:lnSpc>
-              <a:spcAft>
-                <a:spcPts val="300"/>
-              </a:spcAft>
-              <a:buSzPct val="100000"/>
-              <a:buChar char="•"/>
-            </a:pPr>
-            <a:r>
-              <a:rPr lang="en-US" sz="1200" b="1" dirty="0">
-                <a:solidFill>
-                  <a:srgbClr val="1C2833"/>
-                </a:solidFill>
-                <a:latin typeface="Arial" pitchFamily="34" charset="0"/>
-                <a:ea typeface="Arial" pitchFamily="34" charset="-122"/>
-                <a:cs typeface="Arial" pitchFamily="34" charset="-120"/>
-              </a:rPr>
-              <a:t>The principle:</a:t>
-            </a:r>
-            <a:pPr algn="l" indent="0" marL="0">
-              <a:lnSpc>
-                <a:spcPts val="1620"/>
-              </a:lnSpc>
-              <a:spcAft>
-                <a:spcPts val="300"/>
-              </a:spcAft>
-              <a:buNone/>
-            </a:pPr>
-            <a:r>
-              <a:rPr lang="en-US" sz="1200" dirty="0">
-                <a:solidFill>
-                  <a:srgbClr val="1C2833"/>
-                </a:solidFill>
-                <a:latin typeface="Arial" pitchFamily="34" charset="0"/>
-                <a:ea typeface="Arial" pitchFamily="34" charset="-122"/>
-                <a:cs typeface="Arial" pitchFamily="34" charset="-120"/>
-              </a:rPr>
-              <a:t> a balanced meal includes ALL six tastes. Traditional Indian thalis are designed this way — you'll notice rice (sweet), pickle (sour/salty), chili (pungent), bitter gourd or fenugreek (bitter), and a pulse-based dish (astringent).</a:t>
+            <a:pPr algn="l" indent="0" marL="0">
+              <a:lnSpc>
+                <a:spcPts val="1680"/>
+              </a:lnSpc>
+              <a:spcBef>
+                <a:spcPts val="300"/>
+              </a:spcBef>
+              <a:spcAft>
+                <a:spcPts val="300"/>
+              </a:spcAft>
+              <a:buNone/>
+            </a:pPr>
+            <a:r>
+              <a:rPr lang="en-US" sz="1200" i="1" dirty="0">
+                <a:solidFill>
+                  <a:srgbClr val="1C2833"/>
+                </a:solidFill>
+                <a:latin typeface="Arial" pitchFamily="34" charset="0"/>
+                <a:ea typeface="Arial" pitchFamily="34" charset="-122"/>
+                <a:cs typeface="Arial" pitchFamily="34" charset="-120"/>
+              </a:rPr>
+              <a:t>Each row: Sanskrit · English · Examples · Dosha effect.</a:t>
             </a:r>
             <a:endParaRPr lang="en-US" sz="1200" dirty="0"/>
           </a:p>
@@ -4048,8 +4030,8 @@
         </p:nvSpPr>
         <p:spPr>
           <a:xfrm>
-            <a:off x="634901" y="3811042"/>
-            <a:ext cx="8102798" cy="281880"/>
+            <a:off x="634901" y="1556445"/>
+            <a:ext cx="8102798" cy="1500783"/>
           </a:xfrm>
           <a:prstGeom prst="rect">
             <a:avLst/>
@@ -4080,7 +4062,247 @@
                 <a:ea typeface="Arial" pitchFamily="34" charset="-122"/>
                 <a:cs typeface="Arial" pitchFamily="34" charset="-120"/>
               </a:rPr>
-              <a:t>Meal timing:</a:t>
+              <a:t>Madhura</a:t>
+            </a:r>
+            <a:pPr algn="l" indent="0" marL="0">
+              <a:lnSpc>
+                <a:spcPts val="1620"/>
+              </a:lnSpc>
+              <a:spcAft>
+                <a:spcPts val="300"/>
+              </a:spcAft>
+              <a:buNone/>
+            </a:pPr>
+            <a:r>
+              <a:rPr lang="en-US" sz="1200" dirty="0">
+                <a:solidFill>
+                  <a:srgbClr val="1C2833"/>
+                </a:solidFill>
+                <a:latin typeface="Arial" pitchFamily="34" charset="0"/>
+                <a:ea typeface="Arial" pitchFamily="34" charset="-122"/>
+                <a:cs typeface="Arial" pitchFamily="34" charset="-120"/>
+              </a:rPr>
+              <a:t> — Sweet · Rice, milk, sugar, fruit · ↓ Vāta, ↓ Pitta, ↑ Kapha</a:t>
+            </a:r>
+            <a:endParaRPr lang="en-US" sz="1200" dirty="0"/>
+          </a:p>
+          <a:p>
+            <a:pPr algn="l" marL="342900" indent="-342900">
+              <a:lnSpc>
+                <a:spcPts val="1620"/>
+              </a:lnSpc>
+              <a:spcAft>
+                <a:spcPts val="300"/>
+              </a:spcAft>
+              <a:buSzPct val="100000"/>
+              <a:buChar char="•"/>
+            </a:pPr>
+            <a:r>
+              <a:rPr lang="en-US" sz="1200" b="1" dirty="0">
+                <a:solidFill>
+                  <a:srgbClr val="1C2833"/>
+                </a:solidFill>
+                <a:latin typeface="Arial" pitchFamily="34" charset="0"/>
+                <a:ea typeface="Arial" pitchFamily="34" charset="-122"/>
+                <a:cs typeface="Arial" pitchFamily="34" charset="-120"/>
+              </a:rPr>
+              <a:t>Amla</a:t>
+            </a:r>
+            <a:pPr algn="l" indent="0" marL="0">
+              <a:lnSpc>
+                <a:spcPts val="1620"/>
+              </a:lnSpc>
+              <a:spcAft>
+                <a:spcPts val="300"/>
+              </a:spcAft>
+              <a:buNone/>
+            </a:pPr>
+            <a:r>
+              <a:rPr lang="en-US" sz="1200" dirty="0">
+                <a:solidFill>
+                  <a:srgbClr val="1C2833"/>
+                </a:solidFill>
+                <a:latin typeface="Arial" pitchFamily="34" charset="0"/>
+                <a:ea typeface="Arial" pitchFamily="34" charset="-122"/>
+                <a:cs typeface="Arial" pitchFamily="34" charset="-120"/>
+              </a:rPr>
+              <a:t> — Sour · Citrus, yogurt, vinegar · ↓ Vāta, ↑ Pitta, ↑ Kapha</a:t>
+            </a:r>
+            <a:endParaRPr lang="en-US" sz="1200" dirty="0"/>
+          </a:p>
+          <a:p>
+            <a:pPr algn="l" marL="342900" indent="-342900">
+              <a:lnSpc>
+                <a:spcPts val="1620"/>
+              </a:lnSpc>
+              <a:spcAft>
+                <a:spcPts val="300"/>
+              </a:spcAft>
+              <a:buSzPct val="100000"/>
+              <a:buChar char="•"/>
+            </a:pPr>
+            <a:r>
+              <a:rPr lang="en-US" sz="1200" b="1" dirty="0">
+                <a:solidFill>
+                  <a:srgbClr val="1C2833"/>
+                </a:solidFill>
+                <a:latin typeface="Arial" pitchFamily="34" charset="0"/>
+                <a:ea typeface="Arial" pitchFamily="34" charset="-122"/>
+                <a:cs typeface="Arial" pitchFamily="34" charset="-120"/>
+              </a:rPr>
+              <a:t>Lavaṇa</a:t>
+            </a:r>
+            <a:pPr algn="l" indent="0" marL="0">
+              <a:lnSpc>
+                <a:spcPts val="1620"/>
+              </a:lnSpc>
+              <a:spcAft>
+                <a:spcPts val="300"/>
+              </a:spcAft>
+              <a:buNone/>
+            </a:pPr>
+            <a:r>
+              <a:rPr lang="en-US" sz="1200" dirty="0">
+                <a:solidFill>
+                  <a:srgbClr val="1C2833"/>
+                </a:solidFill>
+                <a:latin typeface="Arial" pitchFamily="34" charset="0"/>
+                <a:ea typeface="Arial" pitchFamily="34" charset="-122"/>
+                <a:cs typeface="Arial" pitchFamily="34" charset="-120"/>
+              </a:rPr>
+              <a:t> — Salty · Salt, sea vegetables · ↓ Vāta, ↑ Pitta, ↑ Kapha</a:t>
+            </a:r>
+            <a:endParaRPr lang="en-US" sz="1200" dirty="0"/>
+          </a:p>
+          <a:p>
+            <a:pPr algn="l" marL="342900" indent="-342900">
+              <a:lnSpc>
+                <a:spcPts val="1620"/>
+              </a:lnSpc>
+              <a:spcAft>
+                <a:spcPts val="300"/>
+              </a:spcAft>
+              <a:buSzPct val="100000"/>
+              <a:buChar char="•"/>
+            </a:pPr>
+            <a:r>
+              <a:rPr lang="en-US" sz="1200" b="1" dirty="0">
+                <a:solidFill>
+                  <a:srgbClr val="1C2833"/>
+                </a:solidFill>
+                <a:latin typeface="Arial" pitchFamily="34" charset="0"/>
+                <a:ea typeface="Arial" pitchFamily="34" charset="-122"/>
+                <a:cs typeface="Arial" pitchFamily="34" charset="-120"/>
+              </a:rPr>
+              <a:t>Kaṭu</a:t>
+            </a:r>
+            <a:pPr algn="l" indent="0" marL="0">
+              <a:lnSpc>
+                <a:spcPts val="1620"/>
+              </a:lnSpc>
+              <a:spcAft>
+                <a:spcPts val="300"/>
+              </a:spcAft>
+              <a:buNone/>
+            </a:pPr>
+            <a:r>
+              <a:rPr lang="en-US" sz="1200" dirty="0">
+                <a:solidFill>
+                  <a:srgbClr val="1C2833"/>
+                </a:solidFill>
+                <a:latin typeface="Arial" pitchFamily="34" charset="0"/>
+                <a:ea typeface="Arial" pitchFamily="34" charset="-122"/>
+                <a:cs typeface="Arial" pitchFamily="34" charset="-120"/>
+              </a:rPr>
+              <a:t> — Pungent · Chili, ginger, garlic · ↑ Vāta, ↑ Pitta, ↓ Kapha</a:t>
+            </a:r>
+            <a:endParaRPr lang="en-US" sz="1200" dirty="0"/>
+          </a:p>
+          <a:p>
+            <a:pPr algn="l" marL="342900" indent="-342900">
+              <a:lnSpc>
+                <a:spcPts val="1620"/>
+              </a:lnSpc>
+              <a:spcAft>
+                <a:spcPts val="300"/>
+              </a:spcAft>
+              <a:buSzPct val="100000"/>
+              <a:buChar char="•"/>
+            </a:pPr>
+            <a:r>
+              <a:rPr lang="en-US" sz="1200" b="1" dirty="0">
+                <a:solidFill>
+                  <a:srgbClr val="1C2833"/>
+                </a:solidFill>
+                <a:latin typeface="Arial" pitchFamily="34" charset="0"/>
+                <a:ea typeface="Arial" pitchFamily="34" charset="-122"/>
+                <a:cs typeface="Arial" pitchFamily="34" charset="-120"/>
+              </a:rPr>
+              <a:t>Tikta</a:t>
+            </a:r>
+            <a:pPr algn="l" indent="0" marL="0">
+              <a:lnSpc>
+                <a:spcPts val="1620"/>
+              </a:lnSpc>
+              <a:spcAft>
+                <a:spcPts val="300"/>
+              </a:spcAft>
+              <a:buNone/>
+            </a:pPr>
+            <a:r>
+              <a:rPr lang="en-US" sz="1200" dirty="0">
+                <a:solidFill>
+                  <a:srgbClr val="1C2833"/>
+                </a:solidFill>
+                <a:latin typeface="Arial" pitchFamily="34" charset="0"/>
+                <a:ea typeface="Arial" pitchFamily="34" charset="-122"/>
+                <a:cs typeface="Arial" pitchFamily="34" charset="-120"/>
+              </a:rPr>
+              <a:t> — Bitter · Bitter gourd, turmeric, neem · ↑ Vāta, ↓ Pitta, ↓ Kapha</a:t>
+            </a:r>
+            <a:endParaRPr lang="en-US" sz="1200" dirty="0"/>
+          </a:p>
+          <a:p>
+            <a:pPr algn="l" marL="342900" indent="-342900">
+              <a:lnSpc>
+                <a:spcPts val="1620"/>
+              </a:lnSpc>
+              <a:spcAft>
+                <a:spcPts val="300"/>
+              </a:spcAft>
+              <a:buSzPct val="100000"/>
+              <a:buChar char="•"/>
+            </a:pPr>
+            <a:r>
+              <a:rPr lang="en-US" sz="1200" b="1" dirty="0">
+                <a:solidFill>
+                  <a:srgbClr val="1C2833"/>
+                </a:solidFill>
+                <a:latin typeface="Arial" pitchFamily="34" charset="0"/>
+                <a:ea typeface="Arial" pitchFamily="34" charset="-122"/>
+                <a:cs typeface="Arial" pitchFamily="34" charset="-120"/>
+              </a:rPr>
+              <a:t>Kaṣāya</a:t>
+            </a:r>
+            <a:pPr algn="l" indent="0" marL="0">
+              <a:lnSpc>
+                <a:spcPts val="1620"/>
+              </a:lnSpc>
+              <a:spcAft>
+                <a:spcPts val="300"/>
+              </a:spcAft>
+              <a:buNone/>
+            </a:pPr>
+            <a:r>
+              <a:rPr lang="en-US" sz="1200" dirty="0">
+                <a:solidFill>
+                  <a:srgbClr val="1C2833"/>
+                </a:solidFill>
+                <a:latin typeface="Arial" pitchFamily="34" charset="0"/>
+                <a:ea typeface="Arial" pitchFamily="34" charset="-122"/>
+                <a:cs typeface="Arial" pitchFamily="34" charset="-120"/>
+              </a:rPr>
+              <a:t> — Astringent · Banana (unripe), pomegranate, beans · ↑ Vāta, ↓ Pitta, ↓ Kapha</a:t>
             </a:r>
             <a:endParaRPr lang="en-US" sz="1200" dirty="0"/>
           </a:p>
@@ -4094,8 +4316,8 @@
         </p:nvSpPr>
         <p:spPr>
           <a:xfrm>
-            <a:off x="406301" y="4181773"/>
-            <a:ext cx="8498026" cy="426541"/>
+            <a:off x="634901" y="3158728"/>
+            <a:ext cx="8102798" cy="487561"/>
           </a:xfrm>
           <a:prstGeom prst="rect">
             <a:avLst/>
@@ -4107,13 +4329,31 @@
           <a:bodyPr wrap="square" lIns="0" tIns="0" rIns="0" bIns="0" rtlCol="0" anchor="t"/>
           <a:lstStyle/>
           <a:p>
-            <a:pPr algn="l" indent="0" marL="0">
-              <a:lnSpc>
-                <a:spcPts val="1680"/>
-              </a:lnSpc>
-              <a:spcBef>
-                <a:spcPts val="300"/>
-              </a:spcBef>
+            <a:pPr algn="l" marL="342900" indent="-342900">
+              <a:lnSpc>
+                <a:spcPts val="1620"/>
+              </a:lnSpc>
+              <a:spcAft>
+                <a:spcPts val="300"/>
+              </a:spcAft>
+              <a:buSzPct val="100000"/>
+              <a:buChar char="•"/>
+            </a:pPr>
+            <a:r>
+              <a:rPr lang="en-US" sz="1200" b="1" dirty="0">
+                <a:solidFill>
+                  <a:srgbClr val="1C2833"/>
+                </a:solidFill>
+                <a:latin typeface="Arial" pitchFamily="34" charset="0"/>
+                <a:ea typeface="Arial" pitchFamily="34" charset="-122"/>
+                <a:cs typeface="Arial" pitchFamily="34" charset="-120"/>
+              </a:rPr>
+              <a:t>The principle:</a:t>
+            </a:r>
+            <a:pPr algn="l" indent="0" marL="0">
+              <a:lnSpc>
+                <a:spcPts val="1620"/>
+              </a:lnSpc>
               <a:spcAft>
                 <a:spcPts val="300"/>
               </a:spcAft>
@@ -4128,7 +4368,7 @@
                 <a:ea typeface="Arial" pitchFamily="34" charset="-122"/>
                 <a:cs typeface="Arial" pitchFamily="34" charset="-120"/>
               </a:rPr>
-              <a:t>– Largest meal at midday (Pitta peak — digestion strongest).    – Light dinner before sunset (ideally).    – No heavy meal close to bedtime.</a:t>
+              <a:t> a balanced meal includes ALL six tastes. Traditional Indian thalis are designed this way — you'll notice rice (sweet), pickle (sour/salty), chili (pungent), bitter gourd or fenugreek (bitter), and a pulse-based dish (astringent).</a:t>
             </a:r>
             <a:endParaRPr lang="en-US" sz="1200" dirty="0"/>
           </a:p>
@@ -4142,7 +4382,7 @@
         </p:nvSpPr>
         <p:spPr>
           <a:xfrm>
-            <a:off x="634901" y="4697164"/>
+            <a:off x="634901" y="3747790"/>
             <a:ext cx="8102798" cy="281880"/>
           </a:xfrm>
           <a:prstGeom prst="rect">
@@ -4174,67 +4414,7 @@
                 <a:ea typeface="Arial" pitchFamily="34" charset="-122"/>
                 <a:cs typeface="Arial" pitchFamily="34" charset="-120"/>
               </a:rPr>
-              <a:t>One food rule:</a:t>
-            </a:r>
-            <a:pPr algn="l" indent="0" marL="0">
-              <a:lnSpc>
-                <a:spcPts val="1620"/>
-              </a:lnSpc>
-              <a:spcAft>
-                <a:spcPts val="300"/>
-              </a:spcAft>
-              <a:buNone/>
-            </a:pPr>
-            <a:r>
-              <a:rPr lang="en-US" sz="1200" dirty="0">
-                <a:solidFill>
-                  <a:srgbClr val="1C2833"/>
-                </a:solidFill>
-                <a:latin typeface="Arial" pitchFamily="34" charset="0"/>
-                <a:ea typeface="Arial" pitchFamily="34" charset="-122"/>
-                <a:cs typeface="Arial" pitchFamily="34" charset="-120"/>
-              </a:rPr>
-              <a:t> </a:t>
-            </a:r>
-            <a:pPr algn="l" indent="0" marL="0">
-              <a:lnSpc>
-                <a:spcPts val="1620"/>
-              </a:lnSpc>
-              <a:spcAft>
-                <a:spcPts val="300"/>
-              </a:spcAft>
-              <a:buNone/>
-            </a:pPr>
-            <a:r>
-              <a:rPr lang="en-US" sz="1200" i="1" dirty="0">
-                <a:solidFill>
-                  <a:srgbClr val="1C2833"/>
-                </a:solidFill>
-                <a:latin typeface="Arial" pitchFamily="34" charset="0"/>
-                <a:ea typeface="Arial" pitchFamily="34" charset="-122"/>
-                <a:cs typeface="Arial" pitchFamily="34" charset="-120"/>
-              </a:rPr>
-              <a:t>Virrudha-ahāra</a:t>
-            </a:r>
-            <a:pPr algn="l" indent="0" marL="0">
-              <a:lnSpc>
-                <a:spcPts val="1620"/>
-              </a:lnSpc>
-              <a:spcAft>
-                <a:spcPts val="300"/>
-              </a:spcAft>
-              <a:buNone/>
-            </a:pPr>
-            <a:r>
-              <a:rPr lang="en-US" sz="1200" dirty="0">
-                <a:solidFill>
-                  <a:srgbClr val="1C2833"/>
-                </a:solidFill>
-                <a:latin typeface="Arial" pitchFamily="34" charset="0"/>
-                <a:ea typeface="Arial" pitchFamily="34" charset="-122"/>
-                <a:cs typeface="Arial" pitchFamily="34" charset="-120"/>
-              </a:rPr>
-              <a:t> — incompatible food combinations. Classical examples:</a:t>
+              <a:t>Meal timing:</a:t>
             </a:r>
             <a:endParaRPr lang="en-US" sz="1200" dirty="0"/>
           </a:p>
@@ -4248,7 +4428,7 @@
         </p:nvSpPr>
         <p:spPr>
           <a:xfrm>
-            <a:off x="406301" y="5067895"/>
+            <a:off x="406301" y="4118521"/>
             <a:ext cx="8498026" cy="426541"/>
           </a:xfrm>
           <a:prstGeom prst="rect">
@@ -4282,7 +4462,7 @@
                 <a:ea typeface="Arial" pitchFamily="34" charset="-122"/>
                 <a:cs typeface="Arial" pitchFamily="34" charset="-120"/>
               </a:rPr>
-              <a:t>– Milk + fish (heating + cooling combination).    – Milk + sour fruit (digestive disturbance).    – Honey heated above body temperature (changes its qualities).</a:t>
+              <a:t>– Largest meal at midday (Pitta peak — digestion strongest).    – Light dinner before sunset (ideally).    – No heavy meal close to bedtime.</a:t>
             </a:r>
             <a:endParaRPr lang="en-US" sz="1200" dirty="0"/>
           </a:p>
@@ -4296,8 +4476,8 @@
         </p:nvSpPr>
         <p:spPr>
           <a:xfrm>
-            <a:off x="406301" y="5570637"/>
-            <a:ext cx="8498026" cy="426541"/>
+            <a:off x="634901" y="4633913"/>
+            <a:ext cx="8102798" cy="281880"/>
           </a:xfrm>
           <a:prstGeom prst="rect">
             <a:avLst/>
@@ -4309,13 +4489,31 @@
           <a:bodyPr wrap="square" lIns="0" tIns="0" rIns="0" bIns="0" rtlCol="0" anchor="t"/>
           <a:lstStyle/>
           <a:p>
-            <a:pPr algn="l" indent="0" marL="0">
-              <a:lnSpc>
-                <a:spcPts val="1680"/>
-              </a:lnSpc>
-              <a:spcBef>
-                <a:spcPts val="300"/>
-              </a:spcBef>
+            <a:pPr algn="l" marL="342900" indent="-342900">
+              <a:lnSpc>
+                <a:spcPts val="1620"/>
+              </a:lnSpc>
+              <a:spcAft>
+                <a:spcPts val="300"/>
+              </a:spcAft>
+              <a:buSzPct val="100000"/>
+              <a:buChar char="•"/>
+            </a:pPr>
+            <a:r>
+              <a:rPr lang="en-US" sz="1200" b="1" dirty="0">
+                <a:solidFill>
+                  <a:srgbClr val="1C2833"/>
+                </a:solidFill>
+                <a:latin typeface="Arial" pitchFamily="34" charset="0"/>
+                <a:ea typeface="Arial" pitchFamily="34" charset="-122"/>
+                <a:cs typeface="Arial" pitchFamily="34" charset="-120"/>
+              </a:rPr>
+              <a:t>One food rule:</a:t>
+            </a:r>
+            <a:pPr algn="l" indent="0" marL="0">
+              <a:lnSpc>
+                <a:spcPts val="1620"/>
+              </a:lnSpc>
               <a:spcAft>
                 <a:spcPts val="300"/>
               </a:spcAft>
@@ -4330,7 +4528,47 @@
                 <a:ea typeface="Arial" pitchFamily="34" charset="-122"/>
                 <a:cs typeface="Arial" pitchFamily="34" charset="-120"/>
               </a:rPr>
-              <a:t>Note: some virrudha-ahāra rules have modern evidence (e.g. some lactose-fruit-acid interactions); others are traditional with limited validation.</a:t>
+              <a:t> </a:t>
+            </a:r>
+            <a:pPr algn="l" indent="0" marL="0">
+              <a:lnSpc>
+                <a:spcPts val="1620"/>
+              </a:lnSpc>
+              <a:spcAft>
+                <a:spcPts val="300"/>
+              </a:spcAft>
+              <a:buNone/>
+            </a:pPr>
+            <a:r>
+              <a:rPr lang="en-US" sz="1200" i="1" dirty="0">
+                <a:solidFill>
+                  <a:srgbClr val="1C2833"/>
+                </a:solidFill>
+                <a:latin typeface="Arial" pitchFamily="34" charset="0"/>
+                <a:ea typeface="Arial" pitchFamily="34" charset="-122"/>
+                <a:cs typeface="Arial" pitchFamily="34" charset="-120"/>
+              </a:rPr>
+              <a:t>Virrudha-ahāra</a:t>
+            </a:r>
+            <a:pPr algn="l" indent="0" marL="0">
+              <a:lnSpc>
+                <a:spcPts val="1620"/>
+              </a:lnSpc>
+              <a:spcAft>
+                <a:spcPts val="300"/>
+              </a:spcAft>
+              <a:buNone/>
+            </a:pPr>
+            <a:r>
+              <a:rPr lang="en-US" sz="1200" dirty="0">
+                <a:solidFill>
+                  <a:srgbClr val="1C2833"/>
+                </a:solidFill>
+                <a:latin typeface="Arial" pitchFamily="34" charset="0"/>
+                <a:ea typeface="Arial" pitchFamily="34" charset="-122"/>
+                <a:cs typeface="Arial" pitchFamily="34" charset="-120"/>
+              </a:rPr>
+              <a:t> — incompatible food combinations. Classical examples:</a:t>
             </a:r>
             <a:endParaRPr lang="en-US" sz="1200" dirty="0"/>
           </a:p>
@@ -4344,7 +4582,103 @@
         </p:nvSpPr>
         <p:spPr>
           <a:xfrm>
-            <a:off x="406301" y="6149578"/>
+            <a:off x="406301" y="5004643"/>
+            <a:ext cx="8498026" cy="426541"/>
+          </a:xfrm>
+          <a:prstGeom prst="rect">
+            <a:avLst/>
+          </a:prstGeom>
+          <a:noFill/>
+          <a:ln/>
+        </p:spPr>
+        <p:txBody>
+          <a:bodyPr wrap="square" lIns="0" tIns="0" rIns="0" bIns="0" rtlCol="0" anchor="t"/>
+          <a:lstStyle/>
+          <a:p>
+            <a:pPr algn="l" indent="0" marL="0">
+              <a:lnSpc>
+                <a:spcPts val="1680"/>
+              </a:lnSpc>
+              <a:spcBef>
+                <a:spcPts val="300"/>
+              </a:spcBef>
+              <a:spcAft>
+                <a:spcPts val="300"/>
+              </a:spcAft>
+              <a:buNone/>
+            </a:pPr>
+            <a:r>
+              <a:rPr lang="en-US" sz="1200" dirty="0">
+                <a:solidFill>
+                  <a:srgbClr val="1C2833"/>
+                </a:solidFill>
+                <a:latin typeface="Arial" pitchFamily="34" charset="0"/>
+                <a:ea typeface="Arial" pitchFamily="34" charset="-122"/>
+                <a:cs typeface="Arial" pitchFamily="34" charset="-120"/>
+              </a:rPr>
+              <a:t>– Milk + fish (heating + cooling combination).    – Milk + sour fruit (digestive disturbance).    – Honey heated above body temperature (changes its qualities).</a:t>
+            </a:r>
+            <a:endParaRPr lang="en-US" sz="1200" dirty="0"/>
+          </a:p>
+        </p:txBody>
+      </p:sp>
+      <p:sp>
+        <p:nvSpPr>
+          <p:cNvPr id="12" name="Text 10"/>
+          <p:cNvSpPr/>
+          <p:nvPr/>
+        </p:nvSpPr>
+        <p:spPr>
+          <a:xfrm>
+            <a:off x="406301" y="5507385"/>
+            <a:ext cx="8498026" cy="426541"/>
+          </a:xfrm>
+          <a:prstGeom prst="rect">
+            <a:avLst/>
+          </a:prstGeom>
+          <a:noFill/>
+          <a:ln/>
+        </p:spPr>
+        <p:txBody>
+          <a:bodyPr wrap="square" lIns="0" tIns="0" rIns="0" bIns="0" rtlCol="0" anchor="t"/>
+          <a:lstStyle/>
+          <a:p>
+            <a:pPr algn="l" indent="0" marL="0">
+              <a:lnSpc>
+                <a:spcPts val="1680"/>
+              </a:lnSpc>
+              <a:spcBef>
+                <a:spcPts val="300"/>
+              </a:spcBef>
+              <a:spcAft>
+                <a:spcPts val="300"/>
+              </a:spcAft>
+              <a:buNone/>
+            </a:pPr>
+            <a:r>
+              <a:rPr lang="en-US" sz="1200" dirty="0">
+                <a:solidFill>
+                  <a:srgbClr val="1C2833"/>
+                </a:solidFill>
+                <a:latin typeface="Arial" pitchFamily="34" charset="0"/>
+                <a:ea typeface="Arial" pitchFamily="34" charset="-122"/>
+                <a:cs typeface="Arial" pitchFamily="34" charset="-120"/>
+              </a:rPr>
+              <a:t>Note: some virrudha-ahāra rules have modern evidence (e.g. some lactose-fruit-acid interactions); others are traditional with limited validation.</a:t>
+            </a:r>
+            <a:endParaRPr lang="en-US" sz="1200" dirty="0"/>
+          </a:p>
+        </p:txBody>
+      </p:sp>
+      <p:sp>
+        <p:nvSpPr>
+          <p:cNvPr id="13" name="Text 11"/>
+          <p:cNvSpPr/>
+          <p:nvPr/>
+        </p:nvSpPr>
+        <p:spPr>
+          <a:xfrm>
+            <a:off x="406301" y="6086326"/>
             <a:ext cx="8498026" cy="213271"/>
           </a:xfrm>
           <a:prstGeom prst="rect">

--- a/exports/pptx/lessons/middle-module-03-ayurveda-good-health/day-06-ahara.pptx
+++ b/exports/pptx/lessons/middle-module-03-ayurveda-good-health/day-06-ahara.pptx
@@ -17,9 +17,14 @@
     <p:sldId id="265" r:id="rId11"/>
     <p:sldId id="266" r:id="rId12"/>
     <p:sldId id="267" r:id="rId13"/>
+    <p:sldId id="268" r:id="rId14"/>
+    <p:sldId id="269" r:id="rId15"/>
+    <p:sldId id="270" r:id="rId16"/>
+    <p:sldId id="271" r:id="rId17"/>
+    <p:sldId id="272" r:id="rId18"/>
   </p:sldIdLst>
   <p:notesMasterIdLst>
-    <p:notesMasterId r:id="rId14"/>
+    <p:notesMasterId r:id="rId19"/>
   </p:notesMasterIdLst>
   <p:sldSz cx="9144000" cy="5143500"/>
   <p:notesSz cx="5143500" cy="9144000"/>
@@ -801,6 +806,446 @@
             <a:fld id="{F7021451-1387-4CA6-816F-3879F97B5CBC}" type="slidenum">
               <a:rPr lang="en-US"/>
               <a:t>12</a:t>
+            </a:fld>
+            <a:endParaRPr lang="en-US"/>
+          </a:p>
+        </p:txBody>
+      </p:sp>
+    </p:spTree>
+    <p:extLst>
+      <p:ext uri="{BB962C8B-B14F-4D97-AF65-F5344CB8AC3E}">
+        <p14:creationId xmlns:p14="http://schemas.microsoft.com/office/powerpoint/2010/main" val="1024086991"/>
+      </p:ext>
+    </p:extLst>
+  </p:cSld>
+  <p:clrMapOvr>
+    <a:masterClrMapping/>
+  </p:clrMapOvr>
+</p:notes>
+</file>
+
+<file path=ppt/notesSlides/notesSlide13.xml><?xml version="1.0" encoding="utf-8"?>
+<p:notes xmlns:a="http://schemas.openxmlformats.org/drawingml/2006/main" xmlns:r="http://schemas.openxmlformats.org/officeDocument/2006/relationships" xmlns:p="http://schemas.openxmlformats.org/presentationml/2006/main">
+  <p:cSld>
+    <p:spTree>
+      <p:nvGrpSpPr>
+        <p:cNvPr id="1" name=""/>
+        <p:cNvGrpSpPr/>
+        <p:nvPr/>
+      </p:nvGrpSpPr>
+      <p:grpSpPr>
+        <a:xfrm>
+          <a:off x="0" y="0"/>
+          <a:ext cx="0" cy="0"/>
+          <a:chOff x="0" y="0"/>
+          <a:chExt cx="0" cy="0"/>
+        </a:xfrm>
+      </p:grpSpPr>
+      <p:sp>
+        <p:nvSpPr>
+          <p:cNvPr id="2" name="Slide Image Placeholder 1"/>
+          <p:cNvSpPr>
+            <a:spLocks noGrp="1" noRot="1" noChangeAspect="1"/>
+          </p:cNvSpPr>
+          <p:nvPr>
+            <p:ph type="sldImg"/>
+          </p:nvPr>
+        </p:nvSpPr>
+        <p:spPr/>
+      </p:sp>
+      <p:sp>
+        <p:nvSpPr>
+          <p:cNvPr id="3" name="Notes Placeholder 2"/>
+          <p:cNvSpPr>
+            <a:spLocks noGrp="1"/>
+          </p:cNvSpPr>
+          <p:nvPr>
+            <p:ph type="body" idx="1"/>
+          </p:nvPr>
+        </p:nvSpPr>
+        <p:spPr/>
+        <p:txBody>
+          <a:bodyPr/>
+          <a:lstStyle/>
+          <a:p>
+            <a:r>
+              <a:rPr lang="en-US" dirty="0"/>
+              <a:t/>
+            </a:r>
+            <a:endParaRPr lang="en-US" dirty="0"/>
+          </a:p>
+        </p:txBody>
+      </p:sp>
+      <p:sp>
+        <p:nvSpPr>
+          <p:cNvPr id="4" name="Slide Number Placeholder 3"/>
+          <p:cNvSpPr>
+            <a:spLocks noGrp="1"/>
+          </p:cNvSpPr>
+          <p:nvPr>
+            <p:ph type="sldNum" sz="quarter" idx="10"/>
+          </p:nvPr>
+        </p:nvSpPr>
+        <p:spPr/>
+        <p:txBody>
+          <a:bodyPr/>
+          <a:lstStyle/>
+          <a:p>
+            <a:fld id="{F7021451-1387-4CA6-816F-3879F97B5CBC}" type="slidenum">
+              <a:rPr lang="en-US"/>
+              <a:t>13</a:t>
+            </a:fld>
+            <a:endParaRPr lang="en-US"/>
+          </a:p>
+        </p:txBody>
+      </p:sp>
+    </p:spTree>
+    <p:extLst>
+      <p:ext uri="{BB962C8B-B14F-4D97-AF65-F5344CB8AC3E}">
+        <p14:creationId xmlns:p14="http://schemas.microsoft.com/office/powerpoint/2010/main" val="1024086991"/>
+      </p:ext>
+    </p:extLst>
+  </p:cSld>
+  <p:clrMapOvr>
+    <a:masterClrMapping/>
+  </p:clrMapOvr>
+</p:notes>
+</file>
+
+<file path=ppt/notesSlides/notesSlide14.xml><?xml version="1.0" encoding="utf-8"?>
+<p:notes xmlns:a="http://schemas.openxmlformats.org/drawingml/2006/main" xmlns:r="http://schemas.openxmlformats.org/officeDocument/2006/relationships" xmlns:p="http://schemas.openxmlformats.org/presentationml/2006/main">
+  <p:cSld>
+    <p:spTree>
+      <p:nvGrpSpPr>
+        <p:cNvPr id="1" name=""/>
+        <p:cNvGrpSpPr/>
+        <p:nvPr/>
+      </p:nvGrpSpPr>
+      <p:grpSpPr>
+        <a:xfrm>
+          <a:off x="0" y="0"/>
+          <a:ext cx="0" cy="0"/>
+          <a:chOff x="0" y="0"/>
+          <a:chExt cx="0" cy="0"/>
+        </a:xfrm>
+      </p:grpSpPr>
+      <p:sp>
+        <p:nvSpPr>
+          <p:cNvPr id="2" name="Slide Image Placeholder 1"/>
+          <p:cNvSpPr>
+            <a:spLocks noGrp="1" noRot="1" noChangeAspect="1"/>
+          </p:cNvSpPr>
+          <p:nvPr>
+            <p:ph type="sldImg"/>
+          </p:nvPr>
+        </p:nvSpPr>
+        <p:spPr/>
+      </p:sp>
+      <p:sp>
+        <p:nvSpPr>
+          <p:cNvPr id="3" name="Notes Placeholder 2"/>
+          <p:cNvSpPr>
+            <a:spLocks noGrp="1"/>
+          </p:cNvSpPr>
+          <p:nvPr>
+            <p:ph type="body" idx="1"/>
+          </p:nvPr>
+        </p:nvSpPr>
+        <p:spPr/>
+        <p:txBody>
+          <a:bodyPr/>
+          <a:lstStyle/>
+          <a:p>
+            <a:r>
+              <a:rPr lang="en-US" dirty="0"/>
+              <a:t/>
+            </a:r>
+            <a:endParaRPr lang="en-US" dirty="0"/>
+          </a:p>
+        </p:txBody>
+      </p:sp>
+      <p:sp>
+        <p:nvSpPr>
+          <p:cNvPr id="4" name="Slide Number Placeholder 3"/>
+          <p:cNvSpPr>
+            <a:spLocks noGrp="1"/>
+          </p:cNvSpPr>
+          <p:nvPr>
+            <p:ph type="sldNum" sz="quarter" idx="10"/>
+          </p:nvPr>
+        </p:nvSpPr>
+        <p:spPr/>
+        <p:txBody>
+          <a:bodyPr/>
+          <a:lstStyle/>
+          <a:p>
+            <a:fld id="{F7021451-1387-4CA6-816F-3879F97B5CBC}" type="slidenum">
+              <a:rPr lang="en-US"/>
+              <a:t>14</a:t>
+            </a:fld>
+            <a:endParaRPr lang="en-US"/>
+          </a:p>
+        </p:txBody>
+      </p:sp>
+    </p:spTree>
+    <p:extLst>
+      <p:ext uri="{BB962C8B-B14F-4D97-AF65-F5344CB8AC3E}">
+        <p14:creationId xmlns:p14="http://schemas.microsoft.com/office/powerpoint/2010/main" val="1024086991"/>
+      </p:ext>
+    </p:extLst>
+  </p:cSld>
+  <p:clrMapOvr>
+    <a:masterClrMapping/>
+  </p:clrMapOvr>
+</p:notes>
+</file>
+
+<file path=ppt/notesSlides/notesSlide15.xml><?xml version="1.0" encoding="utf-8"?>
+<p:notes xmlns:a="http://schemas.openxmlformats.org/drawingml/2006/main" xmlns:r="http://schemas.openxmlformats.org/officeDocument/2006/relationships" xmlns:p="http://schemas.openxmlformats.org/presentationml/2006/main">
+  <p:cSld>
+    <p:spTree>
+      <p:nvGrpSpPr>
+        <p:cNvPr id="1" name=""/>
+        <p:cNvGrpSpPr/>
+        <p:nvPr/>
+      </p:nvGrpSpPr>
+      <p:grpSpPr>
+        <a:xfrm>
+          <a:off x="0" y="0"/>
+          <a:ext cx="0" cy="0"/>
+          <a:chOff x="0" y="0"/>
+          <a:chExt cx="0" cy="0"/>
+        </a:xfrm>
+      </p:grpSpPr>
+      <p:sp>
+        <p:nvSpPr>
+          <p:cNvPr id="2" name="Slide Image Placeholder 1"/>
+          <p:cNvSpPr>
+            <a:spLocks noGrp="1" noRot="1" noChangeAspect="1"/>
+          </p:cNvSpPr>
+          <p:nvPr>
+            <p:ph type="sldImg"/>
+          </p:nvPr>
+        </p:nvSpPr>
+        <p:spPr/>
+      </p:sp>
+      <p:sp>
+        <p:nvSpPr>
+          <p:cNvPr id="3" name="Notes Placeholder 2"/>
+          <p:cNvSpPr>
+            <a:spLocks noGrp="1"/>
+          </p:cNvSpPr>
+          <p:nvPr>
+            <p:ph type="body" idx="1"/>
+          </p:nvPr>
+        </p:nvSpPr>
+        <p:spPr/>
+        <p:txBody>
+          <a:bodyPr/>
+          <a:lstStyle/>
+          <a:p>
+            <a:r>
+              <a:rPr lang="en-US" dirty="0"/>
+              <a:t/>
+            </a:r>
+            <a:endParaRPr lang="en-US" dirty="0"/>
+          </a:p>
+        </p:txBody>
+      </p:sp>
+      <p:sp>
+        <p:nvSpPr>
+          <p:cNvPr id="4" name="Slide Number Placeholder 3"/>
+          <p:cNvSpPr>
+            <a:spLocks noGrp="1"/>
+          </p:cNvSpPr>
+          <p:nvPr>
+            <p:ph type="sldNum" sz="quarter" idx="10"/>
+          </p:nvPr>
+        </p:nvSpPr>
+        <p:spPr/>
+        <p:txBody>
+          <a:bodyPr/>
+          <a:lstStyle/>
+          <a:p>
+            <a:fld id="{F7021451-1387-4CA6-816F-3879F97B5CBC}" type="slidenum">
+              <a:rPr lang="en-US"/>
+              <a:t>15</a:t>
+            </a:fld>
+            <a:endParaRPr lang="en-US"/>
+          </a:p>
+        </p:txBody>
+      </p:sp>
+    </p:spTree>
+    <p:extLst>
+      <p:ext uri="{BB962C8B-B14F-4D97-AF65-F5344CB8AC3E}">
+        <p14:creationId xmlns:p14="http://schemas.microsoft.com/office/powerpoint/2010/main" val="1024086991"/>
+      </p:ext>
+    </p:extLst>
+  </p:cSld>
+  <p:clrMapOvr>
+    <a:masterClrMapping/>
+  </p:clrMapOvr>
+</p:notes>
+</file>
+
+<file path=ppt/notesSlides/notesSlide16.xml><?xml version="1.0" encoding="utf-8"?>
+<p:notes xmlns:a="http://schemas.openxmlformats.org/drawingml/2006/main" xmlns:r="http://schemas.openxmlformats.org/officeDocument/2006/relationships" xmlns:p="http://schemas.openxmlformats.org/presentationml/2006/main">
+  <p:cSld>
+    <p:spTree>
+      <p:nvGrpSpPr>
+        <p:cNvPr id="1" name=""/>
+        <p:cNvGrpSpPr/>
+        <p:nvPr/>
+      </p:nvGrpSpPr>
+      <p:grpSpPr>
+        <a:xfrm>
+          <a:off x="0" y="0"/>
+          <a:ext cx="0" cy="0"/>
+          <a:chOff x="0" y="0"/>
+          <a:chExt cx="0" cy="0"/>
+        </a:xfrm>
+      </p:grpSpPr>
+      <p:sp>
+        <p:nvSpPr>
+          <p:cNvPr id="2" name="Slide Image Placeholder 1"/>
+          <p:cNvSpPr>
+            <a:spLocks noGrp="1" noRot="1" noChangeAspect="1"/>
+          </p:cNvSpPr>
+          <p:nvPr>
+            <p:ph type="sldImg"/>
+          </p:nvPr>
+        </p:nvSpPr>
+        <p:spPr/>
+      </p:sp>
+      <p:sp>
+        <p:nvSpPr>
+          <p:cNvPr id="3" name="Notes Placeholder 2"/>
+          <p:cNvSpPr>
+            <a:spLocks noGrp="1"/>
+          </p:cNvSpPr>
+          <p:nvPr>
+            <p:ph type="body" idx="1"/>
+          </p:nvPr>
+        </p:nvSpPr>
+        <p:spPr/>
+        <p:txBody>
+          <a:bodyPr/>
+          <a:lstStyle/>
+          <a:p>
+            <a:r>
+              <a:rPr lang="en-US" dirty="0"/>
+              <a:t/>
+            </a:r>
+            <a:endParaRPr lang="en-US" dirty="0"/>
+          </a:p>
+        </p:txBody>
+      </p:sp>
+      <p:sp>
+        <p:nvSpPr>
+          <p:cNvPr id="4" name="Slide Number Placeholder 3"/>
+          <p:cNvSpPr>
+            <a:spLocks noGrp="1"/>
+          </p:cNvSpPr>
+          <p:nvPr>
+            <p:ph type="sldNum" sz="quarter" idx="10"/>
+          </p:nvPr>
+        </p:nvSpPr>
+        <p:spPr/>
+        <p:txBody>
+          <a:bodyPr/>
+          <a:lstStyle/>
+          <a:p>
+            <a:fld id="{F7021451-1387-4CA6-816F-3879F97B5CBC}" type="slidenum">
+              <a:rPr lang="en-US"/>
+              <a:t>16</a:t>
+            </a:fld>
+            <a:endParaRPr lang="en-US"/>
+          </a:p>
+        </p:txBody>
+      </p:sp>
+    </p:spTree>
+    <p:extLst>
+      <p:ext uri="{BB962C8B-B14F-4D97-AF65-F5344CB8AC3E}">
+        <p14:creationId xmlns:p14="http://schemas.microsoft.com/office/powerpoint/2010/main" val="1024086991"/>
+      </p:ext>
+    </p:extLst>
+  </p:cSld>
+  <p:clrMapOvr>
+    <a:masterClrMapping/>
+  </p:clrMapOvr>
+</p:notes>
+</file>
+
+<file path=ppt/notesSlides/notesSlide17.xml><?xml version="1.0" encoding="utf-8"?>
+<p:notes xmlns:a="http://schemas.openxmlformats.org/drawingml/2006/main" xmlns:r="http://schemas.openxmlformats.org/officeDocument/2006/relationships" xmlns:p="http://schemas.openxmlformats.org/presentationml/2006/main">
+  <p:cSld>
+    <p:spTree>
+      <p:nvGrpSpPr>
+        <p:cNvPr id="1" name=""/>
+        <p:cNvGrpSpPr/>
+        <p:nvPr/>
+      </p:nvGrpSpPr>
+      <p:grpSpPr>
+        <a:xfrm>
+          <a:off x="0" y="0"/>
+          <a:ext cx="0" cy="0"/>
+          <a:chOff x="0" y="0"/>
+          <a:chExt cx="0" cy="0"/>
+        </a:xfrm>
+      </p:grpSpPr>
+      <p:sp>
+        <p:nvSpPr>
+          <p:cNvPr id="2" name="Slide Image Placeholder 1"/>
+          <p:cNvSpPr>
+            <a:spLocks noGrp="1" noRot="1" noChangeAspect="1"/>
+          </p:cNvSpPr>
+          <p:nvPr>
+            <p:ph type="sldImg"/>
+          </p:nvPr>
+        </p:nvSpPr>
+        <p:spPr/>
+      </p:sp>
+      <p:sp>
+        <p:nvSpPr>
+          <p:cNvPr id="3" name="Notes Placeholder 2"/>
+          <p:cNvSpPr>
+            <a:spLocks noGrp="1"/>
+          </p:cNvSpPr>
+          <p:nvPr>
+            <p:ph type="body" idx="1"/>
+          </p:nvPr>
+        </p:nvSpPr>
+        <p:spPr/>
+        <p:txBody>
+          <a:bodyPr/>
+          <a:lstStyle/>
+          <a:p>
+            <a:r>
+              <a:rPr lang="en-US" dirty="0"/>
+              <a:t/>
+            </a:r>
+            <a:endParaRPr lang="en-US" dirty="0"/>
+          </a:p>
+        </p:txBody>
+      </p:sp>
+      <p:sp>
+        <p:nvSpPr>
+          <p:cNvPr id="4" name="Slide Number Placeholder 3"/>
+          <p:cNvSpPr>
+            <a:spLocks noGrp="1"/>
+          </p:cNvSpPr>
+          <p:nvPr>
+            <p:ph type="sldNum" sz="quarter" idx="10"/>
+          </p:nvPr>
+        </p:nvSpPr>
+        <p:spPr/>
+        <p:txBody>
+          <a:bodyPr/>
+          <a:lstStyle/>
+          <a:p>
+            <a:fld id="{F7021451-1387-4CA6-816F-3879F97B5CBC}" type="slidenum">
+              <a:rPr lang="en-US"/>
+              <a:t>17</a:t>
             </a:fld>
             <a:endParaRPr lang="en-US"/>
           </a:p>
@@ -2054,148 +2499,6 @@
         </p:nvSpPr>
         <p:spPr>
           <a:xfrm>
-            <a:off x="406301" y="1223963"/>
-            <a:ext cx="8498026" cy="274290"/>
-          </a:xfrm>
-          <a:prstGeom prst="rect">
-            <a:avLst/>
-          </a:prstGeom>
-          <a:noFill/>
-          <a:ln/>
-        </p:spPr>
-        <p:txBody>
-          <a:bodyPr wrap="square" lIns="0" tIns="0" rIns="0" bIns="0" rtlCol="0" anchor="t"/>
-          <a:lstStyle/>
-          <a:p>
-            <a:pPr algn="l" indent="0" marL="0">
-              <a:lnSpc>
-                <a:spcPts val="2160"/>
-              </a:lnSpc>
-              <a:spcBef>
-                <a:spcPts val="600"/>
-              </a:spcBef>
-              <a:spcAft>
-                <a:spcPts val="800"/>
-              </a:spcAft>
-              <a:buNone/>
-            </a:pPr>
-            <a:r>
-              <a:rPr lang="en-US" sz="1800" b="1" dirty="0">
-                <a:solidFill>
-                  <a:srgbClr val="FE4447"/>
-                </a:solidFill>
-                <a:latin typeface="Georgia" pitchFamily="34" charset="0"/>
-                <a:ea typeface="Georgia" pitchFamily="34" charset="-122"/>
-                <a:cs typeface="Georgia" pitchFamily="34" charset="-120"/>
-              </a:rPr>
-              <a:t>Learning objective</a:t>
-            </a:r>
-            <a:endParaRPr lang="en-US" sz="1800" dirty="0"/>
-          </a:p>
-        </p:txBody>
-      </p:sp>
-      <p:sp>
-        <p:nvSpPr>
-          <p:cNvPr id="6" name="Text 4"/>
-          <p:cNvSpPr/>
-          <p:nvPr/>
-        </p:nvSpPr>
-        <p:spPr>
-          <a:xfrm>
-            <a:off x="406301" y="1637854"/>
-            <a:ext cx="8498026" cy="426541"/>
-          </a:xfrm>
-          <a:prstGeom prst="rect">
-            <a:avLst/>
-          </a:prstGeom>
-          <a:noFill/>
-          <a:ln/>
-        </p:spPr>
-        <p:txBody>
-          <a:bodyPr wrap="square" lIns="0" tIns="0" rIns="0" bIns="0" rtlCol="0" anchor="t"/>
-          <a:lstStyle/>
-          <a:p>
-            <a:pPr algn="l" indent="0" marL="0">
-              <a:lnSpc>
-                <a:spcPts val="1680"/>
-              </a:lnSpc>
-              <a:spcBef>
-                <a:spcPts val="300"/>
-              </a:spcBef>
-              <a:spcAft>
-                <a:spcPts val="300"/>
-              </a:spcAft>
-              <a:buNone/>
-            </a:pPr>
-            <a:r>
-              <a:rPr lang="en-US" sz="1200" dirty="0">
-                <a:solidFill>
-                  <a:srgbClr val="1C2833"/>
-                </a:solidFill>
-                <a:latin typeface="Arial" pitchFamily="34" charset="0"/>
-                <a:ea typeface="Arial" pitchFamily="34" charset="-122"/>
-                <a:cs typeface="Arial" pitchFamily="34" charset="-120"/>
-              </a:rPr>
-              <a:t>Students name the six tastes (</a:t>
-            </a:r>
-            <a:pPr algn="l" indent="0" marL="0">
-              <a:lnSpc>
-                <a:spcPts val="1680"/>
-              </a:lnSpc>
-              <a:spcBef>
-                <a:spcPts val="300"/>
-              </a:spcBef>
-              <a:spcAft>
-                <a:spcPts val="300"/>
-              </a:spcAft>
-              <a:buNone/>
-            </a:pPr>
-            <a:r>
-              <a:rPr lang="en-US" sz="1200" i="1" dirty="0">
-                <a:solidFill>
-                  <a:srgbClr val="1C2833"/>
-                </a:solidFill>
-                <a:latin typeface="Arial" pitchFamily="34" charset="0"/>
-                <a:ea typeface="Arial" pitchFamily="34" charset="-122"/>
-                <a:cs typeface="Arial" pitchFamily="34" charset="-120"/>
-              </a:rPr>
-              <a:t>rasa</a:t>
-            </a:r>
-            <a:pPr algn="l" indent="0" marL="0">
-              <a:lnSpc>
-                <a:spcPts val="1680"/>
-              </a:lnSpc>
-              <a:spcBef>
-                <a:spcPts val="300"/>
-              </a:spcBef>
-              <a:spcAft>
-                <a:spcPts val="300"/>
-              </a:spcAft>
-              <a:buNone/>
-            </a:pPr>
-            <a:r>
-              <a:rPr lang="en-US" sz="1200" dirty="0">
-                <a:solidFill>
-                  <a:srgbClr val="1C2833"/>
-                </a:solidFill>
-                <a:latin typeface="Arial" pitchFamily="34" charset="0"/>
-                <a:ea typeface="Arial" pitchFamily="34" charset="-122"/>
-                <a:cs typeface="Arial" pitchFamily="34" charset="-120"/>
-              </a:rPr>
-              <a:t>) in Ayurveda, the recommended meal-timing principle, and one food pairing tradition recommends avoiding.</a:t>
-            </a:r>
-            <a:endParaRPr lang="en-US" sz="1200" dirty="0"/>
-          </a:p>
-        </p:txBody>
-      </p:sp>
-      <p:sp>
-        <p:nvSpPr>
-          <p:cNvPr id="7" name="Text 5"/>
-          <p:cNvSpPr/>
-          <p:nvPr/>
-        </p:nvSpPr>
-        <p:spPr>
-          <a:xfrm>
             <a:off x="406301" y="4434929"/>
             <a:ext cx="8498026" cy="213271"/>
           </a:xfrm>
@@ -2340,7 +2643,7 @@
                 <a:ea typeface="Georgia" pitchFamily="34" charset="-122"/>
                 <a:cs typeface="Georgia" pitchFamily="34" charset="-120"/>
               </a:rPr>
-              <a:t>Differentiation</a:t>
+              <a:t>Core (25 min) (cont.)</a:t>
             </a:r>
             <a:endParaRPr lang="en-US" sz="1800" dirty="0"/>
           </a:p>
@@ -2355,7 +2658,7 @@
         <p:spPr>
           <a:xfrm>
             <a:off x="634901" y="883593"/>
-            <a:ext cx="8102798" cy="525661"/>
+            <a:ext cx="8102798" cy="281880"/>
           </a:xfrm>
           <a:prstGeom prst="rect">
             <a:avLst/>
@@ -2386,30 +2689,32 @@
                 <a:ea typeface="Arial" pitchFamily="34" charset="-122"/>
                 <a:cs typeface="Arial" pitchFamily="34" charset="-120"/>
               </a:rPr>
-              <a:t>Tier up:</a:t>
-            </a:r>
-            <a:pPr algn="l" indent="0" marL="0">
-              <a:lnSpc>
-                <a:spcPts val="1620"/>
-              </a:lnSpc>
-              <a:spcAft>
-                <a:spcPts val="300"/>
-              </a:spcAft>
-              <a:buNone/>
-            </a:pPr>
-            <a:r>
-              <a:rPr lang="en-US" sz="1200" dirty="0">
-                <a:solidFill>
-                  <a:srgbClr val="1C2833"/>
-                </a:solidFill>
-                <a:latin typeface="Arial" pitchFamily="34" charset="0"/>
-                <a:ea typeface="Arial" pitchFamily="34" charset="-122"/>
-                <a:cs typeface="Arial" pitchFamily="34" charset="-120"/>
-              </a:rPr>
-              <a:t> Read about the six-taste theory in Caraka Saṃhitā Sūtra-sthāna chapter 26.</a:t>
+              <a:t>Meal timing:</a:t>
             </a:r>
             <a:endParaRPr lang="en-US" sz="1200" dirty="0"/>
           </a:p>
+        </p:txBody>
+      </p:sp>
+      <p:sp>
+        <p:nvSpPr>
+          <p:cNvPr id="5" name="Text 3"/>
+          <p:cNvSpPr/>
+          <p:nvPr/>
+        </p:nvSpPr>
+        <p:spPr>
+          <a:xfrm>
+            <a:off x="634901" y="1266974"/>
+            <a:ext cx="8102798" cy="769441"/>
+          </a:xfrm>
+          <a:prstGeom prst="rect">
+            <a:avLst/>
+          </a:prstGeom>
+          <a:noFill/>
+          <a:ln/>
+        </p:spPr>
+        <p:txBody>
+          <a:bodyPr wrap="square" lIns="0" tIns="0" rIns="0" bIns="0" rtlCol="0" anchor="t"/>
+          <a:lstStyle/>
           <a:p>
             <a:pPr algn="l" marL="342900" indent="-342900">
               <a:lnSpc>
@@ -2422,24 +2727,28 @@
               <a:buChar char="•"/>
             </a:pPr>
             <a:r>
-              <a:rPr lang="en-US" sz="1200" b="1" dirty="0">
-                <a:solidFill>
-                  <a:srgbClr val="1C2833"/>
-                </a:solidFill>
-                <a:latin typeface="Arial" pitchFamily="34" charset="0"/>
-                <a:ea typeface="Arial" pitchFamily="34" charset="-122"/>
-                <a:cs typeface="Arial" pitchFamily="34" charset="-120"/>
-              </a:rPr>
-              <a:t>Tier down:</a:t>
-            </a:r>
-            <a:pPr algn="l" indent="0" marL="0">
+              <a:rPr lang="en-US" sz="1200" dirty="0">
+                <a:solidFill>
+                  <a:srgbClr val="1C2833"/>
+                </a:solidFill>
+                <a:latin typeface="Arial" pitchFamily="34" charset="0"/>
+                <a:ea typeface="Arial" pitchFamily="34" charset="-122"/>
+                <a:cs typeface="Arial" pitchFamily="34" charset="-120"/>
+              </a:rPr>
+              <a:t>Largest meal at midday (Pitta peak — digestion strongest).</a:t>
+            </a:r>
+            <a:endParaRPr lang="en-US" sz="1200" dirty="0"/>
+          </a:p>
+          <a:p>
+            <a:pPr algn="l" marL="342900" indent="-342900">
               <a:lnSpc>
                 <a:spcPts val="1620"/>
               </a:lnSpc>
               <a:spcAft>
                 <a:spcPts val="300"/>
               </a:spcAft>
-              <a:buNone/>
+              <a:buSzPct val="100000"/>
+              <a:buChar char="•"/>
             </a:pPr>
             <a:r>
               <a:rPr lang="en-US" sz="1200" dirty="0">
@@ -2450,15 +2759,39 @@
                 <a:ea typeface="Arial" pitchFamily="34" charset="-122"/>
                 <a:cs typeface="Arial" pitchFamily="34" charset="-120"/>
               </a:rPr>
-              <a:t> Memorise just 4 tastes (sweet, sour, salty, bitter).</a:t>
+              <a:t>Light dinner before sunset (ideally).</a:t>
             </a:r>
             <a:endParaRPr lang="en-US" sz="1200" dirty="0"/>
           </a:p>
-        </p:txBody>
-      </p:sp>
-      <p:sp>
-        <p:nvSpPr>
-          <p:cNvPr id="5" name="Text 3"/>
+          <a:p>
+            <a:pPr algn="l" marL="342900" indent="-342900">
+              <a:lnSpc>
+                <a:spcPts val="1620"/>
+              </a:lnSpc>
+              <a:spcAft>
+                <a:spcPts val="300"/>
+              </a:spcAft>
+              <a:buSzPct val="100000"/>
+              <a:buChar char="•"/>
+            </a:pPr>
+            <a:r>
+              <a:rPr lang="en-US" sz="1200" dirty="0">
+                <a:solidFill>
+                  <a:srgbClr val="1C2833"/>
+                </a:solidFill>
+                <a:latin typeface="Arial" pitchFamily="34" charset="0"/>
+                <a:ea typeface="Arial" pitchFamily="34" charset="-122"/>
+                <a:cs typeface="Arial" pitchFamily="34" charset="-120"/>
+              </a:rPr>
+              <a:t>No heavy meal close to bedtime.</a:t>
+            </a:r>
+            <a:endParaRPr lang="en-US" sz="1200" dirty="0"/>
+          </a:p>
+        </p:txBody>
+      </p:sp>
+      <p:sp>
+        <p:nvSpPr>
+          <p:cNvPr id="6" name="Text 4"/>
           <p:cNvSpPr/>
           <p:nvPr/>
         </p:nvSpPr>
@@ -2608,7 +2941,7 @@
                 <a:ea typeface="Georgia" pitchFamily="34" charset="-122"/>
                 <a:cs typeface="Georgia" pitchFamily="34" charset="-120"/>
               </a:rPr>
-              <a:t>Teacher notes</a:t>
+              <a:t>Core (25 min) (cont.)</a:t>
             </a:r>
             <a:endParaRPr lang="en-US" sz="1800" dirty="0"/>
           </a:p>
@@ -2622,7 +2955,207 @@
         </p:nvSpPr>
         <p:spPr>
           <a:xfrm>
-            <a:off x="406301" y="870942"/>
+            <a:off x="634901" y="883593"/>
+            <a:ext cx="8102798" cy="281880"/>
+          </a:xfrm>
+          <a:prstGeom prst="rect">
+            <a:avLst/>
+          </a:prstGeom>
+          <a:noFill/>
+          <a:ln/>
+        </p:spPr>
+        <p:txBody>
+          <a:bodyPr wrap="square" lIns="0" tIns="0" rIns="0" bIns="0" rtlCol="0" anchor="t"/>
+          <a:lstStyle/>
+          <a:p>
+            <a:pPr algn="l" marL="342900" indent="-342900">
+              <a:lnSpc>
+                <a:spcPts val="1620"/>
+              </a:lnSpc>
+              <a:spcAft>
+                <a:spcPts val="300"/>
+              </a:spcAft>
+              <a:buSzPct val="100000"/>
+              <a:buChar char="•"/>
+            </a:pPr>
+            <a:r>
+              <a:rPr lang="en-US" sz="1200" b="1" dirty="0">
+                <a:solidFill>
+                  <a:srgbClr val="1C2833"/>
+                </a:solidFill>
+                <a:latin typeface="Arial" pitchFamily="34" charset="0"/>
+                <a:ea typeface="Arial" pitchFamily="34" charset="-122"/>
+                <a:cs typeface="Arial" pitchFamily="34" charset="-120"/>
+              </a:rPr>
+              <a:t>One food rule:</a:t>
+            </a:r>
+            <a:pPr algn="l" indent="0" marL="0">
+              <a:lnSpc>
+                <a:spcPts val="1620"/>
+              </a:lnSpc>
+              <a:spcAft>
+                <a:spcPts val="300"/>
+              </a:spcAft>
+              <a:buNone/>
+            </a:pPr>
+            <a:r>
+              <a:rPr lang="en-US" sz="1200" dirty="0">
+                <a:solidFill>
+                  <a:srgbClr val="1C2833"/>
+                </a:solidFill>
+                <a:latin typeface="Arial" pitchFamily="34" charset="0"/>
+                <a:ea typeface="Arial" pitchFamily="34" charset="-122"/>
+                <a:cs typeface="Arial" pitchFamily="34" charset="-120"/>
+              </a:rPr>
+              <a:t> </a:t>
+            </a:r>
+            <a:pPr algn="l" indent="0" marL="0">
+              <a:lnSpc>
+                <a:spcPts val="1620"/>
+              </a:lnSpc>
+              <a:spcAft>
+                <a:spcPts val="300"/>
+              </a:spcAft>
+              <a:buNone/>
+            </a:pPr>
+            <a:r>
+              <a:rPr lang="en-US" sz="1200" i="1" dirty="0">
+                <a:solidFill>
+                  <a:srgbClr val="1C2833"/>
+                </a:solidFill>
+                <a:latin typeface="Arial" pitchFamily="34" charset="0"/>
+                <a:ea typeface="Arial" pitchFamily="34" charset="-122"/>
+                <a:cs typeface="Arial" pitchFamily="34" charset="-120"/>
+              </a:rPr>
+              <a:t>Virrudha-ahāra</a:t>
+            </a:r>
+            <a:pPr algn="l" indent="0" marL="0">
+              <a:lnSpc>
+                <a:spcPts val="1620"/>
+              </a:lnSpc>
+              <a:spcAft>
+                <a:spcPts val="300"/>
+              </a:spcAft>
+              <a:buNone/>
+            </a:pPr>
+            <a:r>
+              <a:rPr lang="en-US" sz="1200" dirty="0">
+                <a:solidFill>
+                  <a:srgbClr val="1C2833"/>
+                </a:solidFill>
+                <a:latin typeface="Arial" pitchFamily="34" charset="0"/>
+                <a:ea typeface="Arial" pitchFamily="34" charset="-122"/>
+                <a:cs typeface="Arial" pitchFamily="34" charset="-120"/>
+              </a:rPr>
+              <a:t> — incompatible food combinations. Classical examples:</a:t>
+            </a:r>
+            <a:endParaRPr lang="en-US" sz="1200" dirty="0"/>
+          </a:p>
+        </p:txBody>
+      </p:sp>
+      <p:sp>
+        <p:nvSpPr>
+          <p:cNvPr id="5" name="Text 3"/>
+          <p:cNvSpPr/>
+          <p:nvPr/>
+        </p:nvSpPr>
+        <p:spPr>
+          <a:xfrm>
+            <a:off x="634901" y="1266974"/>
+            <a:ext cx="8102798" cy="769441"/>
+          </a:xfrm>
+          <a:prstGeom prst="rect">
+            <a:avLst/>
+          </a:prstGeom>
+          <a:noFill/>
+          <a:ln/>
+        </p:spPr>
+        <p:txBody>
+          <a:bodyPr wrap="square" lIns="0" tIns="0" rIns="0" bIns="0" rtlCol="0" anchor="t"/>
+          <a:lstStyle/>
+          <a:p>
+            <a:pPr algn="l" marL="342900" indent="-342900">
+              <a:lnSpc>
+                <a:spcPts val="1620"/>
+              </a:lnSpc>
+              <a:spcAft>
+                <a:spcPts val="300"/>
+              </a:spcAft>
+              <a:buSzPct val="100000"/>
+              <a:buChar char="•"/>
+            </a:pPr>
+            <a:r>
+              <a:rPr lang="en-US" sz="1200" dirty="0">
+                <a:solidFill>
+                  <a:srgbClr val="1C2833"/>
+                </a:solidFill>
+                <a:latin typeface="Arial" pitchFamily="34" charset="0"/>
+                <a:ea typeface="Arial" pitchFamily="34" charset="-122"/>
+                <a:cs typeface="Arial" pitchFamily="34" charset="-120"/>
+              </a:rPr>
+              <a:t>Milk + fish (heating + cooling combination).</a:t>
+            </a:r>
+            <a:endParaRPr lang="en-US" sz="1200" dirty="0"/>
+          </a:p>
+          <a:p>
+            <a:pPr algn="l" marL="342900" indent="-342900">
+              <a:lnSpc>
+                <a:spcPts val="1620"/>
+              </a:lnSpc>
+              <a:spcAft>
+                <a:spcPts val="300"/>
+              </a:spcAft>
+              <a:buSzPct val="100000"/>
+              <a:buChar char="•"/>
+            </a:pPr>
+            <a:r>
+              <a:rPr lang="en-US" sz="1200" dirty="0">
+                <a:solidFill>
+                  <a:srgbClr val="1C2833"/>
+                </a:solidFill>
+                <a:latin typeface="Arial" pitchFamily="34" charset="0"/>
+                <a:ea typeface="Arial" pitchFamily="34" charset="-122"/>
+                <a:cs typeface="Arial" pitchFamily="34" charset="-120"/>
+              </a:rPr>
+              <a:t>Milk + sour fruit (digestive disturbance).</a:t>
+            </a:r>
+            <a:endParaRPr lang="en-US" sz="1200" dirty="0"/>
+          </a:p>
+          <a:p>
+            <a:pPr algn="l" marL="342900" indent="-342900">
+              <a:lnSpc>
+                <a:spcPts val="1620"/>
+              </a:lnSpc>
+              <a:spcAft>
+                <a:spcPts val="300"/>
+              </a:spcAft>
+              <a:buSzPct val="100000"/>
+              <a:buChar char="•"/>
+            </a:pPr>
+            <a:r>
+              <a:rPr lang="en-US" sz="1200" dirty="0">
+                <a:solidFill>
+                  <a:srgbClr val="1C2833"/>
+                </a:solidFill>
+                <a:latin typeface="Arial" pitchFamily="34" charset="0"/>
+                <a:ea typeface="Arial" pitchFamily="34" charset="-122"/>
+                <a:cs typeface="Arial" pitchFamily="34" charset="-120"/>
+              </a:rPr>
+              <a:t>Honey heated above body temperature (changes its qualities).</a:t>
+            </a:r>
+            <a:endParaRPr lang="en-US" sz="1200" dirty="0"/>
+          </a:p>
+        </p:txBody>
+      </p:sp>
+      <p:sp>
+        <p:nvSpPr>
+          <p:cNvPr id="6" name="Text 4"/>
+          <p:cNvSpPr/>
+          <p:nvPr/>
+        </p:nvSpPr>
+        <p:spPr>
+          <a:xfrm>
+            <a:off x="406301" y="2125266"/>
             <a:ext cx="8498026" cy="426541"/>
           </a:xfrm>
           <a:prstGeom prst="rect">
@@ -2656,7 +3189,7 @@
                 <a:ea typeface="Arial" pitchFamily="34" charset="-122"/>
                 <a:cs typeface="Arial" pitchFamily="34" charset="-120"/>
               </a:rPr>
-              <a:t>– Skip the taste samples if allergies are a concern. – The "milk + fish" rule is famous; honest framing: some virrudha-ahāra has biochemical basis, some is traditional. Don't overstate either way.</a:t>
+              <a:t>Note: some virrudha-ahāra rules have modern evidence (e.g. some lactose-fruit-acid interactions); others are traditional with limited validation.</a:t>
             </a:r>
             <a:endParaRPr lang="en-US" sz="1200" dirty="0"/>
           </a:p>
@@ -2664,7 +3197,7 @@
       </p:sp>
       <p:sp>
         <p:nvSpPr>
-          <p:cNvPr id="5" name="Text 3"/>
+          <p:cNvPr id="7" name="Text 5"/>
           <p:cNvSpPr/>
           <p:nvPr/>
         </p:nvSpPr>
@@ -2814,7 +3347,7 @@
                 <a:ea typeface="Georgia" pitchFamily="34" charset="-122"/>
                 <a:cs typeface="Georgia" pitchFamily="34" charset="-120"/>
               </a:rPr>
-              <a:t>Citation(s) used</a:t>
+              <a:t>Activity (10 min) — Taste tour</a:t>
             </a:r>
             <a:endParaRPr lang="en-US" sz="1800" dirty="0"/>
           </a:p>
@@ -2862,7 +3395,1207 @@
                 <a:ea typeface="Arial" pitchFamily="34" charset="-122"/>
                 <a:cs typeface="Arial" pitchFamily="34" charset="-120"/>
               </a:rPr>
-              <a:t>– Caraka Saṃhitā Sūtra-sthāna ch. 26 — Sharma (1981) translation. – Wujastyk (2003) on the six tastes.</a:t>
+              <a:t>If samples available: tiny sample of each taste, one at a time. Note the sensation. Note what dosha it would affect.</a:t>
+            </a:r>
+            <a:endParaRPr lang="en-US" sz="1200" dirty="0"/>
+          </a:p>
+        </p:txBody>
+      </p:sp>
+      <p:sp>
+        <p:nvSpPr>
+          <p:cNvPr id="5" name="Text 3"/>
+          <p:cNvSpPr/>
+          <p:nvPr/>
+        </p:nvSpPr>
+        <p:spPr>
+          <a:xfrm>
+            <a:off x="406301" y="1160413"/>
+            <a:ext cx="8498026" cy="213271"/>
+          </a:xfrm>
+          <a:prstGeom prst="rect">
+            <a:avLst/>
+          </a:prstGeom>
+          <a:noFill/>
+          <a:ln/>
+        </p:spPr>
+        <p:txBody>
+          <a:bodyPr wrap="square" lIns="0" tIns="0" rIns="0" bIns="0" rtlCol="0" anchor="t"/>
+          <a:lstStyle/>
+          <a:p>
+            <a:pPr algn="l" indent="0" marL="0">
+              <a:lnSpc>
+                <a:spcPts val="1680"/>
+              </a:lnSpc>
+              <a:spcBef>
+                <a:spcPts val="300"/>
+              </a:spcBef>
+              <a:spcAft>
+                <a:spcPts val="300"/>
+              </a:spcAft>
+              <a:buNone/>
+            </a:pPr>
+            <a:r>
+              <a:rPr lang="en-US" sz="1200" dirty="0">
+                <a:solidFill>
+                  <a:srgbClr val="1C2833"/>
+                </a:solidFill>
+                <a:latin typeface="Arial" pitchFamily="34" charset="0"/>
+                <a:ea typeface="Arial" pitchFamily="34" charset="-122"/>
+                <a:cs typeface="Arial" pitchFamily="34" charset="-120"/>
+              </a:rPr>
+              <a:t>If no samples: students list 3 foods they ate in the last 24 hours and identify which tastes were present + missing.</a:t>
+            </a:r>
+            <a:endParaRPr lang="en-US" sz="1200" dirty="0"/>
+          </a:p>
+        </p:txBody>
+      </p:sp>
+      <p:sp>
+        <p:nvSpPr>
+          <p:cNvPr id="6" name="Text 4"/>
+          <p:cNvSpPr/>
+          <p:nvPr/>
+        </p:nvSpPr>
+        <p:spPr>
+          <a:xfrm>
+            <a:off x="406301" y="4434929"/>
+            <a:ext cx="8498026" cy="213271"/>
+          </a:xfrm>
+          <a:prstGeom prst="rect">
+            <a:avLst/>
+          </a:prstGeom>
+          <a:noFill/>
+          <a:ln/>
+        </p:spPr>
+        <p:txBody>
+          <a:bodyPr wrap="square" lIns="0" tIns="0" rIns="0" bIns="0" rtlCol="0" anchor="t"/>
+          <a:lstStyle/>
+          <a:p>
+            <a:pPr algn="l" indent="0" marL="0">
+              <a:lnSpc>
+                <a:spcPts val="1680"/>
+              </a:lnSpc>
+              <a:spcBef>
+                <a:spcPts val="300"/>
+              </a:spcBef>
+              <a:spcAft>
+                <a:spcPts val="300"/>
+              </a:spcAft>
+              <a:buNone/>
+            </a:pPr>
+            <a:r>
+              <a:rPr lang="en-US" sz="1200" dirty="0">
+                <a:solidFill>
+                  <a:srgbClr val="1C2833"/>
+                </a:solidFill>
+                <a:latin typeface="Arial" pitchFamily="34" charset="0"/>
+                <a:ea typeface="Arial" pitchFamily="34" charset="-122"/>
+                <a:cs typeface="Arial" pitchFamily="34" charset="-120"/>
+              </a:rPr>
+              <a:t>Middle ·  · IKS Curriculum</a:t>
+            </a:r>
+            <a:endParaRPr lang="en-US" sz="1200" dirty="0"/>
+          </a:p>
+        </p:txBody>
+      </p:sp>
+    </p:spTree>
+  </p:cSld>
+  <p:clrMapOvr>
+    <a:masterClrMapping/>
+  </p:clrMapOvr>
+</p:sld>
+</file>
+
+<file path=ppt/slides/slide13.xml><?xml version="1.0" encoding="utf-8"?>
+<p:sld xmlns:a="http://schemas.openxmlformats.org/drawingml/2006/main" xmlns:r="http://schemas.openxmlformats.org/officeDocument/2006/relationships" xmlns:p="http://schemas.openxmlformats.org/presentationml/2006/main">
+  <p:cSld name="Slide 13">
+    <p:bg>
+      <p:bgPr>
+        <a:solidFill>
+          <a:srgbClr val="FFFFFF"/>
+        </a:solidFill>
+      </p:bgPr>
+    </p:bg>
+    <p:spTree>
+      <p:nvGrpSpPr>
+        <p:cNvPr id="1" name=""/>
+        <p:cNvGrpSpPr/>
+        <p:nvPr/>
+      </p:nvGrpSpPr>
+      <p:grpSpPr>
+        <a:xfrm>
+          <a:off x="0" y="0"/>
+          <a:ext cx="0" cy="0"/>
+          <a:chOff x="0" y="0"/>
+          <a:chExt cx="0" cy="0"/>
+        </a:xfrm>
+      </p:grpSpPr>
+      <p:sp>
+        <p:nvSpPr>
+          <p:cNvPr id="2" name="Text 0"/>
+          <p:cNvSpPr/>
+          <p:nvPr/>
+        </p:nvSpPr>
+        <p:spPr>
+          <a:xfrm>
+            <a:off x="0" y="0"/>
+            <a:ext cx="9144000" cy="101501"/>
+          </a:xfrm>
+          <a:prstGeom prst="rect">
+            <a:avLst/>
+          </a:prstGeom>
+          <a:solidFill>
+            <a:srgbClr val="277884"/>
+          </a:solidFill>
+          <a:ln/>
+        </p:spPr>
+        <p:txBody>
+          <a:bodyPr wrap="square" rtlCol="0" anchor="ctr"/>
+          <a:lstStyle/>
+          <a:p>
+            <a:pPr indent="0" marL="0">
+              <a:buNone/>
+            </a:pPr>
+            <a:endParaRPr lang="en-US" dirty="0"/>
+          </a:p>
+        </p:txBody>
+      </p:sp>
+      <p:sp>
+        <p:nvSpPr>
+          <p:cNvPr id="3" name="Text 1"/>
+          <p:cNvSpPr/>
+          <p:nvPr/>
+        </p:nvSpPr>
+        <p:spPr>
+          <a:xfrm>
+            <a:off x="406301" y="457051"/>
+            <a:ext cx="8498026" cy="274290"/>
+          </a:xfrm>
+          <a:prstGeom prst="rect">
+            <a:avLst/>
+          </a:prstGeom>
+          <a:noFill/>
+          <a:ln/>
+        </p:spPr>
+        <p:txBody>
+          <a:bodyPr wrap="square" lIns="0" tIns="0" rIns="0" bIns="0" rtlCol="0" anchor="t"/>
+          <a:lstStyle/>
+          <a:p>
+            <a:pPr algn="l" indent="0" marL="0">
+              <a:lnSpc>
+                <a:spcPts val="2160"/>
+              </a:lnSpc>
+              <a:spcBef>
+                <a:spcPts val="600"/>
+              </a:spcBef>
+              <a:spcAft>
+                <a:spcPts val="800"/>
+              </a:spcAft>
+              <a:buNone/>
+            </a:pPr>
+            <a:r>
+              <a:rPr lang="en-US" sz="1800" b="1" dirty="0">
+                <a:solidFill>
+                  <a:srgbClr val="FE4447"/>
+                </a:solidFill>
+                <a:latin typeface="Georgia" pitchFamily="34" charset="0"/>
+                <a:ea typeface="Georgia" pitchFamily="34" charset="-122"/>
+                <a:cs typeface="Georgia" pitchFamily="34" charset="-120"/>
+              </a:rPr>
+              <a:t>Wrap-up (5 min)</a:t>
+            </a:r>
+            <a:endParaRPr lang="en-US" sz="1800" dirty="0"/>
+          </a:p>
+        </p:txBody>
+      </p:sp>
+      <p:sp>
+        <p:nvSpPr>
+          <p:cNvPr id="4" name="Text 2"/>
+          <p:cNvSpPr/>
+          <p:nvPr/>
+        </p:nvSpPr>
+        <p:spPr>
+          <a:xfrm>
+            <a:off x="634901" y="883593"/>
+            <a:ext cx="8102798" cy="281880"/>
+          </a:xfrm>
+          <a:prstGeom prst="rect">
+            <a:avLst/>
+          </a:prstGeom>
+          <a:noFill/>
+          <a:ln/>
+        </p:spPr>
+        <p:txBody>
+          <a:bodyPr wrap="square" lIns="0" tIns="0" rIns="0" bIns="0" rtlCol="0" anchor="t"/>
+          <a:lstStyle/>
+          <a:p>
+            <a:pPr algn="l" marL="342900" indent="-342900">
+              <a:lnSpc>
+                <a:spcPts val="1620"/>
+              </a:lnSpc>
+              <a:spcAft>
+                <a:spcPts val="300"/>
+              </a:spcAft>
+              <a:buSzPct val="100000"/>
+              <a:buChar char="•"/>
+            </a:pPr>
+            <a:r>
+              <a:rPr lang="en-US" sz="1200" dirty="0">
+                <a:solidFill>
+                  <a:srgbClr val="1C2833"/>
+                </a:solidFill>
+                <a:latin typeface="Arial" pitchFamily="34" charset="0"/>
+                <a:ea typeface="Arial" pitchFamily="34" charset="-122"/>
+                <a:cs typeface="Arial" pitchFamily="34" charset="-120"/>
+              </a:rPr>
+              <a:t>Preview Day 7: </a:t>
+            </a:r>
+            <a:pPr algn="l" indent="0" marL="0">
+              <a:lnSpc>
+                <a:spcPts val="1620"/>
+              </a:lnSpc>
+              <a:spcAft>
+                <a:spcPts val="300"/>
+              </a:spcAft>
+              <a:buNone/>
+            </a:pPr>
+            <a:r>
+              <a:rPr lang="en-US" sz="1200" i="1" dirty="0">
+                <a:solidFill>
+                  <a:srgbClr val="1C2833"/>
+                </a:solidFill>
+                <a:latin typeface="Arial" pitchFamily="34" charset="0"/>
+                <a:ea typeface="Arial" pitchFamily="34" charset="-122"/>
+                <a:cs typeface="Arial" pitchFamily="34" charset="-120"/>
+              </a:rPr>
+              <a:t>"Tomorrow — primary source. BG 6.17."</a:t>
+            </a:r>
+            <a:endParaRPr lang="en-US" sz="1200" dirty="0"/>
+          </a:p>
+        </p:txBody>
+      </p:sp>
+      <p:sp>
+        <p:nvSpPr>
+          <p:cNvPr id="5" name="Text 3"/>
+          <p:cNvSpPr/>
+          <p:nvPr/>
+        </p:nvSpPr>
+        <p:spPr>
+          <a:xfrm>
+            <a:off x="406301" y="4434929"/>
+            <a:ext cx="8498026" cy="213271"/>
+          </a:xfrm>
+          <a:prstGeom prst="rect">
+            <a:avLst/>
+          </a:prstGeom>
+          <a:noFill/>
+          <a:ln/>
+        </p:spPr>
+        <p:txBody>
+          <a:bodyPr wrap="square" lIns="0" tIns="0" rIns="0" bIns="0" rtlCol="0" anchor="t"/>
+          <a:lstStyle/>
+          <a:p>
+            <a:pPr algn="l" indent="0" marL="0">
+              <a:lnSpc>
+                <a:spcPts val="1680"/>
+              </a:lnSpc>
+              <a:spcBef>
+                <a:spcPts val="300"/>
+              </a:spcBef>
+              <a:spcAft>
+                <a:spcPts val="300"/>
+              </a:spcAft>
+              <a:buNone/>
+            </a:pPr>
+            <a:r>
+              <a:rPr lang="en-US" sz="1200" dirty="0">
+                <a:solidFill>
+                  <a:srgbClr val="1C2833"/>
+                </a:solidFill>
+                <a:latin typeface="Arial" pitchFamily="34" charset="0"/>
+                <a:ea typeface="Arial" pitchFamily="34" charset="-122"/>
+                <a:cs typeface="Arial" pitchFamily="34" charset="-120"/>
+              </a:rPr>
+              <a:t>Middle ·  · IKS Curriculum</a:t>
+            </a:r>
+            <a:endParaRPr lang="en-US" sz="1200" dirty="0"/>
+          </a:p>
+        </p:txBody>
+      </p:sp>
+    </p:spTree>
+  </p:cSld>
+  <p:clrMapOvr>
+    <a:masterClrMapping/>
+  </p:clrMapOvr>
+</p:sld>
+</file>
+
+<file path=ppt/slides/slide14.xml><?xml version="1.0" encoding="utf-8"?>
+<p:sld xmlns:a="http://schemas.openxmlformats.org/drawingml/2006/main" xmlns:r="http://schemas.openxmlformats.org/officeDocument/2006/relationships" xmlns:p="http://schemas.openxmlformats.org/presentationml/2006/main">
+  <p:cSld name="Slide 14">
+    <p:bg>
+      <p:bgPr>
+        <a:solidFill>
+          <a:srgbClr val="FFFFFF"/>
+        </a:solidFill>
+      </p:bgPr>
+    </p:bg>
+    <p:spTree>
+      <p:nvGrpSpPr>
+        <p:cNvPr id="1" name=""/>
+        <p:cNvGrpSpPr/>
+        <p:nvPr/>
+      </p:nvGrpSpPr>
+      <p:grpSpPr>
+        <a:xfrm>
+          <a:off x="0" y="0"/>
+          <a:ext cx="0" cy="0"/>
+          <a:chOff x="0" y="0"/>
+          <a:chExt cx="0" cy="0"/>
+        </a:xfrm>
+      </p:grpSpPr>
+      <p:sp>
+        <p:nvSpPr>
+          <p:cNvPr id="2" name="Text 0"/>
+          <p:cNvSpPr/>
+          <p:nvPr/>
+        </p:nvSpPr>
+        <p:spPr>
+          <a:xfrm>
+            <a:off x="0" y="0"/>
+            <a:ext cx="9144000" cy="101501"/>
+          </a:xfrm>
+          <a:prstGeom prst="rect">
+            <a:avLst/>
+          </a:prstGeom>
+          <a:solidFill>
+            <a:srgbClr val="277884"/>
+          </a:solidFill>
+          <a:ln/>
+        </p:spPr>
+        <p:txBody>
+          <a:bodyPr wrap="square" rtlCol="0" anchor="ctr"/>
+          <a:lstStyle/>
+          <a:p>
+            <a:pPr indent="0" marL="0">
+              <a:buNone/>
+            </a:pPr>
+            <a:endParaRPr lang="en-US" dirty="0"/>
+          </a:p>
+        </p:txBody>
+      </p:sp>
+      <p:sp>
+        <p:nvSpPr>
+          <p:cNvPr id="3" name="Text 1"/>
+          <p:cNvSpPr/>
+          <p:nvPr/>
+        </p:nvSpPr>
+        <p:spPr>
+          <a:xfrm>
+            <a:off x="406301" y="457051"/>
+            <a:ext cx="8498026" cy="274290"/>
+          </a:xfrm>
+          <a:prstGeom prst="rect">
+            <a:avLst/>
+          </a:prstGeom>
+          <a:noFill/>
+          <a:ln/>
+        </p:spPr>
+        <p:txBody>
+          <a:bodyPr wrap="square" lIns="0" tIns="0" rIns="0" bIns="0" rtlCol="0" anchor="t"/>
+          <a:lstStyle/>
+          <a:p>
+            <a:pPr algn="l" indent="0" marL="0">
+              <a:lnSpc>
+                <a:spcPts val="2160"/>
+              </a:lnSpc>
+              <a:spcBef>
+                <a:spcPts val="600"/>
+              </a:spcBef>
+              <a:spcAft>
+                <a:spcPts val="800"/>
+              </a:spcAft>
+              <a:buNone/>
+            </a:pPr>
+            <a:r>
+              <a:rPr lang="en-US" sz="1800" b="1" dirty="0">
+                <a:solidFill>
+                  <a:srgbClr val="FE4447"/>
+                </a:solidFill>
+                <a:latin typeface="Georgia" pitchFamily="34" charset="0"/>
+                <a:ea typeface="Georgia" pitchFamily="34" charset="-122"/>
+                <a:cs typeface="Georgia" pitchFamily="34" charset="-120"/>
+              </a:rPr>
+              <a:t>Homework</a:t>
+            </a:r>
+            <a:endParaRPr lang="en-US" sz="1800" dirty="0"/>
+          </a:p>
+        </p:txBody>
+      </p:sp>
+      <p:sp>
+        <p:nvSpPr>
+          <p:cNvPr id="4" name="Text 2"/>
+          <p:cNvSpPr/>
+          <p:nvPr/>
+        </p:nvSpPr>
+        <p:spPr>
+          <a:xfrm>
+            <a:off x="634901" y="883593"/>
+            <a:ext cx="8102798" cy="281880"/>
+          </a:xfrm>
+          <a:prstGeom prst="rect">
+            <a:avLst/>
+          </a:prstGeom>
+          <a:noFill/>
+          <a:ln/>
+        </p:spPr>
+        <p:txBody>
+          <a:bodyPr wrap="square" lIns="0" tIns="0" rIns="0" bIns="0" rtlCol="0" anchor="t"/>
+          <a:lstStyle/>
+          <a:p>
+            <a:pPr algn="l" marL="342900" indent="-342900">
+              <a:lnSpc>
+                <a:spcPts val="1620"/>
+              </a:lnSpc>
+              <a:spcAft>
+                <a:spcPts val="300"/>
+              </a:spcAft>
+              <a:buSzPct val="100000"/>
+              <a:buChar char="•"/>
+            </a:pPr>
+            <a:r>
+              <a:rPr lang="en-US" sz="1200" dirty="0">
+                <a:solidFill>
+                  <a:srgbClr val="1C2833"/>
+                </a:solidFill>
+                <a:latin typeface="Arial" pitchFamily="34" charset="0"/>
+                <a:ea typeface="Arial" pitchFamily="34" charset="-122"/>
+                <a:cs typeface="Arial" pitchFamily="34" charset="-120"/>
+              </a:rPr>
+              <a:t>For tomorrow's meals, count how many of the six tastes you include. Aim for at least 4.</a:t>
+            </a:r>
+            <a:endParaRPr lang="en-US" sz="1200" dirty="0"/>
+          </a:p>
+        </p:txBody>
+      </p:sp>
+      <p:sp>
+        <p:nvSpPr>
+          <p:cNvPr id="5" name="Text 3"/>
+          <p:cNvSpPr/>
+          <p:nvPr/>
+        </p:nvSpPr>
+        <p:spPr>
+          <a:xfrm>
+            <a:off x="406301" y="4434929"/>
+            <a:ext cx="8498026" cy="213271"/>
+          </a:xfrm>
+          <a:prstGeom prst="rect">
+            <a:avLst/>
+          </a:prstGeom>
+          <a:noFill/>
+          <a:ln/>
+        </p:spPr>
+        <p:txBody>
+          <a:bodyPr wrap="square" lIns="0" tIns="0" rIns="0" bIns="0" rtlCol="0" anchor="t"/>
+          <a:lstStyle/>
+          <a:p>
+            <a:pPr algn="l" indent="0" marL="0">
+              <a:lnSpc>
+                <a:spcPts val="1680"/>
+              </a:lnSpc>
+              <a:spcBef>
+                <a:spcPts val="300"/>
+              </a:spcBef>
+              <a:spcAft>
+                <a:spcPts val="300"/>
+              </a:spcAft>
+              <a:buNone/>
+            </a:pPr>
+            <a:r>
+              <a:rPr lang="en-US" sz="1200" dirty="0">
+                <a:solidFill>
+                  <a:srgbClr val="1C2833"/>
+                </a:solidFill>
+                <a:latin typeface="Arial" pitchFamily="34" charset="0"/>
+                <a:ea typeface="Arial" pitchFamily="34" charset="-122"/>
+                <a:cs typeface="Arial" pitchFamily="34" charset="-120"/>
+              </a:rPr>
+              <a:t>Middle ·  · IKS Curriculum</a:t>
+            </a:r>
+            <a:endParaRPr lang="en-US" sz="1200" dirty="0"/>
+          </a:p>
+        </p:txBody>
+      </p:sp>
+    </p:spTree>
+  </p:cSld>
+  <p:clrMapOvr>
+    <a:masterClrMapping/>
+  </p:clrMapOvr>
+</p:sld>
+</file>
+
+<file path=ppt/slides/slide15.xml><?xml version="1.0" encoding="utf-8"?>
+<p:sld xmlns:a="http://schemas.openxmlformats.org/drawingml/2006/main" xmlns:r="http://schemas.openxmlformats.org/officeDocument/2006/relationships" xmlns:p="http://schemas.openxmlformats.org/presentationml/2006/main">
+  <p:cSld name="Slide 15">
+    <p:bg>
+      <p:bgPr>
+        <a:solidFill>
+          <a:srgbClr val="FFFFFF"/>
+        </a:solidFill>
+      </p:bgPr>
+    </p:bg>
+    <p:spTree>
+      <p:nvGrpSpPr>
+        <p:cNvPr id="1" name=""/>
+        <p:cNvGrpSpPr/>
+        <p:nvPr/>
+      </p:nvGrpSpPr>
+      <p:grpSpPr>
+        <a:xfrm>
+          <a:off x="0" y="0"/>
+          <a:ext cx="0" cy="0"/>
+          <a:chOff x="0" y="0"/>
+          <a:chExt cx="0" cy="0"/>
+        </a:xfrm>
+      </p:grpSpPr>
+      <p:sp>
+        <p:nvSpPr>
+          <p:cNvPr id="2" name="Text 0"/>
+          <p:cNvSpPr/>
+          <p:nvPr/>
+        </p:nvSpPr>
+        <p:spPr>
+          <a:xfrm>
+            <a:off x="0" y="0"/>
+            <a:ext cx="9144000" cy="101501"/>
+          </a:xfrm>
+          <a:prstGeom prst="rect">
+            <a:avLst/>
+          </a:prstGeom>
+          <a:solidFill>
+            <a:srgbClr val="277884"/>
+          </a:solidFill>
+          <a:ln/>
+        </p:spPr>
+        <p:txBody>
+          <a:bodyPr wrap="square" rtlCol="0" anchor="ctr"/>
+          <a:lstStyle/>
+          <a:p>
+            <a:pPr indent="0" marL="0">
+              <a:buNone/>
+            </a:pPr>
+            <a:endParaRPr lang="en-US" dirty="0"/>
+          </a:p>
+        </p:txBody>
+      </p:sp>
+      <p:sp>
+        <p:nvSpPr>
+          <p:cNvPr id="3" name="Text 1"/>
+          <p:cNvSpPr/>
+          <p:nvPr/>
+        </p:nvSpPr>
+        <p:spPr>
+          <a:xfrm>
+            <a:off x="406301" y="457051"/>
+            <a:ext cx="8498026" cy="274290"/>
+          </a:xfrm>
+          <a:prstGeom prst="rect">
+            <a:avLst/>
+          </a:prstGeom>
+          <a:noFill/>
+          <a:ln/>
+        </p:spPr>
+        <p:txBody>
+          <a:bodyPr wrap="square" lIns="0" tIns="0" rIns="0" bIns="0" rtlCol="0" anchor="t"/>
+          <a:lstStyle/>
+          <a:p>
+            <a:pPr algn="l" indent="0" marL="0">
+              <a:lnSpc>
+                <a:spcPts val="2160"/>
+              </a:lnSpc>
+              <a:spcBef>
+                <a:spcPts val="600"/>
+              </a:spcBef>
+              <a:spcAft>
+                <a:spcPts val="800"/>
+              </a:spcAft>
+              <a:buNone/>
+            </a:pPr>
+            <a:r>
+              <a:rPr lang="en-US" sz="1800" b="1" dirty="0">
+                <a:solidFill>
+                  <a:srgbClr val="FE4447"/>
+                </a:solidFill>
+                <a:latin typeface="Georgia" pitchFamily="34" charset="0"/>
+                <a:ea typeface="Georgia" pitchFamily="34" charset="-122"/>
+                <a:cs typeface="Georgia" pitchFamily="34" charset="-120"/>
+              </a:rPr>
+              <a:t>Differentiation</a:t>
+            </a:r>
+            <a:endParaRPr lang="en-US" sz="1800" dirty="0"/>
+          </a:p>
+        </p:txBody>
+      </p:sp>
+      <p:sp>
+        <p:nvSpPr>
+          <p:cNvPr id="4" name="Text 2"/>
+          <p:cNvSpPr/>
+          <p:nvPr/>
+        </p:nvSpPr>
+        <p:spPr>
+          <a:xfrm>
+            <a:off x="634901" y="883593"/>
+            <a:ext cx="8102798" cy="525661"/>
+          </a:xfrm>
+          <a:prstGeom prst="rect">
+            <a:avLst/>
+          </a:prstGeom>
+          <a:noFill/>
+          <a:ln/>
+        </p:spPr>
+        <p:txBody>
+          <a:bodyPr wrap="square" lIns="0" tIns="0" rIns="0" bIns="0" rtlCol="0" anchor="t"/>
+          <a:lstStyle/>
+          <a:p>
+            <a:pPr algn="l" marL="342900" indent="-342900">
+              <a:lnSpc>
+                <a:spcPts val="1620"/>
+              </a:lnSpc>
+              <a:spcAft>
+                <a:spcPts val="300"/>
+              </a:spcAft>
+              <a:buSzPct val="100000"/>
+              <a:buChar char="•"/>
+            </a:pPr>
+            <a:r>
+              <a:rPr lang="en-US" sz="1200" b="1" dirty="0">
+                <a:solidFill>
+                  <a:srgbClr val="1C2833"/>
+                </a:solidFill>
+                <a:latin typeface="Arial" pitchFamily="34" charset="0"/>
+                <a:ea typeface="Arial" pitchFamily="34" charset="-122"/>
+                <a:cs typeface="Arial" pitchFamily="34" charset="-120"/>
+              </a:rPr>
+              <a:t>Tier up:</a:t>
+            </a:r>
+            <a:pPr algn="l" indent="0" marL="0">
+              <a:lnSpc>
+                <a:spcPts val="1620"/>
+              </a:lnSpc>
+              <a:spcAft>
+                <a:spcPts val="300"/>
+              </a:spcAft>
+              <a:buNone/>
+            </a:pPr>
+            <a:r>
+              <a:rPr lang="en-US" sz="1200" dirty="0">
+                <a:solidFill>
+                  <a:srgbClr val="1C2833"/>
+                </a:solidFill>
+                <a:latin typeface="Arial" pitchFamily="34" charset="0"/>
+                <a:ea typeface="Arial" pitchFamily="34" charset="-122"/>
+                <a:cs typeface="Arial" pitchFamily="34" charset="-120"/>
+              </a:rPr>
+              <a:t> Read about the six-taste theory in Caraka Saṃhitā Sūtra-sthāna chapter 26.</a:t>
+            </a:r>
+            <a:endParaRPr lang="en-US" sz="1200" dirty="0"/>
+          </a:p>
+          <a:p>
+            <a:pPr algn="l" marL="342900" indent="-342900">
+              <a:lnSpc>
+                <a:spcPts val="1620"/>
+              </a:lnSpc>
+              <a:spcAft>
+                <a:spcPts val="300"/>
+              </a:spcAft>
+              <a:buSzPct val="100000"/>
+              <a:buChar char="•"/>
+            </a:pPr>
+            <a:r>
+              <a:rPr lang="en-US" sz="1200" b="1" dirty="0">
+                <a:solidFill>
+                  <a:srgbClr val="1C2833"/>
+                </a:solidFill>
+                <a:latin typeface="Arial" pitchFamily="34" charset="0"/>
+                <a:ea typeface="Arial" pitchFamily="34" charset="-122"/>
+                <a:cs typeface="Arial" pitchFamily="34" charset="-120"/>
+              </a:rPr>
+              <a:t>Tier down:</a:t>
+            </a:r>
+            <a:pPr algn="l" indent="0" marL="0">
+              <a:lnSpc>
+                <a:spcPts val="1620"/>
+              </a:lnSpc>
+              <a:spcAft>
+                <a:spcPts val="300"/>
+              </a:spcAft>
+              <a:buNone/>
+            </a:pPr>
+            <a:r>
+              <a:rPr lang="en-US" sz="1200" dirty="0">
+                <a:solidFill>
+                  <a:srgbClr val="1C2833"/>
+                </a:solidFill>
+                <a:latin typeface="Arial" pitchFamily="34" charset="0"/>
+                <a:ea typeface="Arial" pitchFamily="34" charset="-122"/>
+                <a:cs typeface="Arial" pitchFamily="34" charset="-120"/>
+              </a:rPr>
+              <a:t> Memorise just 4 tastes (sweet, sour, salty, bitter).</a:t>
+            </a:r>
+            <a:endParaRPr lang="en-US" sz="1200" dirty="0"/>
+          </a:p>
+        </p:txBody>
+      </p:sp>
+      <p:sp>
+        <p:nvSpPr>
+          <p:cNvPr id="5" name="Text 3"/>
+          <p:cNvSpPr/>
+          <p:nvPr/>
+        </p:nvSpPr>
+        <p:spPr>
+          <a:xfrm>
+            <a:off x="406301" y="4434929"/>
+            <a:ext cx="8498026" cy="213271"/>
+          </a:xfrm>
+          <a:prstGeom prst="rect">
+            <a:avLst/>
+          </a:prstGeom>
+          <a:noFill/>
+          <a:ln/>
+        </p:spPr>
+        <p:txBody>
+          <a:bodyPr wrap="square" lIns="0" tIns="0" rIns="0" bIns="0" rtlCol="0" anchor="t"/>
+          <a:lstStyle/>
+          <a:p>
+            <a:pPr algn="l" indent="0" marL="0">
+              <a:lnSpc>
+                <a:spcPts val="1680"/>
+              </a:lnSpc>
+              <a:spcBef>
+                <a:spcPts val="300"/>
+              </a:spcBef>
+              <a:spcAft>
+                <a:spcPts val="300"/>
+              </a:spcAft>
+              <a:buNone/>
+            </a:pPr>
+            <a:r>
+              <a:rPr lang="en-US" sz="1200" dirty="0">
+                <a:solidFill>
+                  <a:srgbClr val="1C2833"/>
+                </a:solidFill>
+                <a:latin typeface="Arial" pitchFamily="34" charset="0"/>
+                <a:ea typeface="Arial" pitchFamily="34" charset="-122"/>
+                <a:cs typeface="Arial" pitchFamily="34" charset="-120"/>
+              </a:rPr>
+              <a:t>Middle ·  · IKS Curriculum</a:t>
+            </a:r>
+            <a:endParaRPr lang="en-US" sz="1200" dirty="0"/>
+          </a:p>
+        </p:txBody>
+      </p:sp>
+    </p:spTree>
+  </p:cSld>
+  <p:clrMapOvr>
+    <a:masterClrMapping/>
+  </p:clrMapOvr>
+</p:sld>
+</file>
+
+<file path=ppt/slides/slide16.xml><?xml version="1.0" encoding="utf-8"?>
+<p:sld xmlns:a="http://schemas.openxmlformats.org/drawingml/2006/main" xmlns:r="http://schemas.openxmlformats.org/officeDocument/2006/relationships" xmlns:p="http://schemas.openxmlformats.org/presentationml/2006/main">
+  <p:cSld name="Slide 16">
+    <p:bg>
+      <p:bgPr>
+        <a:solidFill>
+          <a:srgbClr val="FFFFFF"/>
+        </a:solidFill>
+      </p:bgPr>
+    </p:bg>
+    <p:spTree>
+      <p:nvGrpSpPr>
+        <p:cNvPr id="1" name=""/>
+        <p:cNvGrpSpPr/>
+        <p:nvPr/>
+      </p:nvGrpSpPr>
+      <p:grpSpPr>
+        <a:xfrm>
+          <a:off x="0" y="0"/>
+          <a:ext cx="0" cy="0"/>
+          <a:chOff x="0" y="0"/>
+          <a:chExt cx="0" cy="0"/>
+        </a:xfrm>
+      </p:grpSpPr>
+      <p:sp>
+        <p:nvSpPr>
+          <p:cNvPr id="2" name="Text 0"/>
+          <p:cNvSpPr/>
+          <p:nvPr/>
+        </p:nvSpPr>
+        <p:spPr>
+          <a:xfrm>
+            <a:off x="0" y="0"/>
+            <a:ext cx="9144000" cy="101501"/>
+          </a:xfrm>
+          <a:prstGeom prst="rect">
+            <a:avLst/>
+          </a:prstGeom>
+          <a:solidFill>
+            <a:srgbClr val="277884"/>
+          </a:solidFill>
+          <a:ln/>
+        </p:spPr>
+        <p:txBody>
+          <a:bodyPr wrap="square" rtlCol="0" anchor="ctr"/>
+          <a:lstStyle/>
+          <a:p>
+            <a:pPr indent="0" marL="0">
+              <a:buNone/>
+            </a:pPr>
+            <a:endParaRPr lang="en-US" dirty="0"/>
+          </a:p>
+        </p:txBody>
+      </p:sp>
+      <p:sp>
+        <p:nvSpPr>
+          <p:cNvPr id="3" name="Text 1"/>
+          <p:cNvSpPr/>
+          <p:nvPr/>
+        </p:nvSpPr>
+        <p:spPr>
+          <a:xfrm>
+            <a:off x="406301" y="457051"/>
+            <a:ext cx="8498026" cy="274290"/>
+          </a:xfrm>
+          <a:prstGeom prst="rect">
+            <a:avLst/>
+          </a:prstGeom>
+          <a:noFill/>
+          <a:ln/>
+        </p:spPr>
+        <p:txBody>
+          <a:bodyPr wrap="square" lIns="0" tIns="0" rIns="0" bIns="0" rtlCol="0" anchor="t"/>
+          <a:lstStyle/>
+          <a:p>
+            <a:pPr algn="l" indent="0" marL="0">
+              <a:lnSpc>
+                <a:spcPts val="2160"/>
+              </a:lnSpc>
+              <a:spcBef>
+                <a:spcPts val="600"/>
+              </a:spcBef>
+              <a:spcAft>
+                <a:spcPts val="800"/>
+              </a:spcAft>
+              <a:buNone/>
+            </a:pPr>
+            <a:r>
+              <a:rPr lang="en-US" sz="1800" b="1" dirty="0">
+                <a:solidFill>
+                  <a:srgbClr val="FE4447"/>
+                </a:solidFill>
+                <a:latin typeface="Georgia" pitchFamily="34" charset="0"/>
+                <a:ea typeface="Georgia" pitchFamily="34" charset="-122"/>
+                <a:cs typeface="Georgia" pitchFamily="34" charset="-120"/>
+              </a:rPr>
+              <a:t>Teacher notes</a:t>
+            </a:r>
+            <a:endParaRPr lang="en-US" sz="1800" dirty="0"/>
+          </a:p>
+        </p:txBody>
+      </p:sp>
+      <p:sp>
+        <p:nvSpPr>
+          <p:cNvPr id="4" name="Text 2"/>
+          <p:cNvSpPr/>
+          <p:nvPr/>
+        </p:nvSpPr>
+        <p:spPr>
+          <a:xfrm>
+            <a:off x="634901" y="883593"/>
+            <a:ext cx="8102798" cy="731341"/>
+          </a:xfrm>
+          <a:prstGeom prst="rect">
+            <a:avLst/>
+          </a:prstGeom>
+          <a:noFill/>
+          <a:ln/>
+        </p:spPr>
+        <p:txBody>
+          <a:bodyPr wrap="square" lIns="0" tIns="0" rIns="0" bIns="0" rtlCol="0" anchor="t"/>
+          <a:lstStyle/>
+          <a:p>
+            <a:pPr algn="l" marL="342900" indent="-342900">
+              <a:lnSpc>
+                <a:spcPts val="1620"/>
+              </a:lnSpc>
+              <a:spcAft>
+                <a:spcPts val="300"/>
+              </a:spcAft>
+              <a:buSzPct val="100000"/>
+              <a:buChar char="•"/>
+            </a:pPr>
+            <a:r>
+              <a:rPr lang="en-US" sz="1200" dirty="0">
+                <a:solidFill>
+                  <a:srgbClr val="1C2833"/>
+                </a:solidFill>
+                <a:latin typeface="Arial" pitchFamily="34" charset="0"/>
+                <a:ea typeface="Arial" pitchFamily="34" charset="-122"/>
+                <a:cs typeface="Arial" pitchFamily="34" charset="-120"/>
+              </a:rPr>
+              <a:t>Skip the taste samples if allergies are a concern.</a:t>
+            </a:r>
+            <a:endParaRPr lang="en-US" sz="1200" dirty="0"/>
+          </a:p>
+          <a:p>
+            <a:pPr algn="l" marL="342900" indent="-342900">
+              <a:lnSpc>
+                <a:spcPts val="1620"/>
+              </a:lnSpc>
+              <a:spcAft>
+                <a:spcPts val="300"/>
+              </a:spcAft>
+              <a:buSzPct val="100000"/>
+              <a:buChar char="•"/>
+            </a:pPr>
+            <a:r>
+              <a:rPr lang="en-US" sz="1200" dirty="0">
+                <a:solidFill>
+                  <a:srgbClr val="1C2833"/>
+                </a:solidFill>
+                <a:latin typeface="Arial" pitchFamily="34" charset="0"/>
+                <a:ea typeface="Arial" pitchFamily="34" charset="-122"/>
+                <a:cs typeface="Arial" pitchFamily="34" charset="-120"/>
+              </a:rPr>
+              <a:t>The "milk + fish" rule is famous; honest framing: some virrudha-ahāra has biochemical basis, some is traditional. Don't overstate either way.</a:t>
+            </a:r>
+            <a:endParaRPr lang="en-US" sz="1200" dirty="0"/>
+          </a:p>
+        </p:txBody>
+      </p:sp>
+      <p:sp>
+        <p:nvSpPr>
+          <p:cNvPr id="5" name="Text 3"/>
+          <p:cNvSpPr/>
+          <p:nvPr/>
+        </p:nvSpPr>
+        <p:spPr>
+          <a:xfrm>
+            <a:off x="406301" y="4434929"/>
+            <a:ext cx="8498026" cy="213271"/>
+          </a:xfrm>
+          <a:prstGeom prst="rect">
+            <a:avLst/>
+          </a:prstGeom>
+          <a:noFill/>
+          <a:ln/>
+        </p:spPr>
+        <p:txBody>
+          <a:bodyPr wrap="square" lIns="0" tIns="0" rIns="0" bIns="0" rtlCol="0" anchor="t"/>
+          <a:lstStyle/>
+          <a:p>
+            <a:pPr algn="l" indent="0" marL="0">
+              <a:lnSpc>
+                <a:spcPts val="1680"/>
+              </a:lnSpc>
+              <a:spcBef>
+                <a:spcPts val="300"/>
+              </a:spcBef>
+              <a:spcAft>
+                <a:spcPts val="300"/>
+              </a:spcAft>
+              <a:buNone/>
+            </a:pPr>
+            <a:r>
+              <a:rPr lang="en-US" sz="1200" dirty="0">
+                <a:solidFill>
+                  <a:srgbClr val="1C2833"/>
+                </a:solidFill>
+                <a:latin typeface="Arial" pitchFamily="34" charset="0"/>
+                <a:ea typeface="Arial" pitchFamily="34" charset="-122"/>
+                <a:cs typeface="Arial" pitchFamily="34" charset="-120"/>
+              </a:rPr>
+              <a:t>Middle ·  · IKS Curriculum</a:t>
+            </a:r>
+            <a:endParaRPr lang="en-US" sz="1200" dirty="0"/>
+          </a:p>
+        </p:txBody>
+      </p:sp>
+    </p:spTree>
+  </p:cSld>
+  <p:clrMapOvr>
+    <a:masterClrMapping/>
+  </p:clrMapOvr>
+</p:sld>
+</file>
+
+<file path=ppt/slides/slide17.xml><?xml version="1.0" encoding="utf-8"?>
+<p:sld xmlns:a="http://schemas.openxmlformats.org/drawingml/2006/main" xmlns:r="http://schemas.openxmlformats.org/officeDocument/2006/relationships" xmlns:p="http://schemas.openxmlformats.org/presentationml/2006/main">
+  <p:cSld name="Slide 17">
+    <p:bg>
+      <p:bgPr>
+        <a:solidFill>
+          <a:srgbClr val="FFFFFF"/>
+        </a:solidFill>
+      </p:bgPr>
+    </p:bg>
+    <p:spTree>
+      <p:nvGrpSpPr>
+        <p:cNvPr id="1" name=""/>
+        <p:cNvGrpSpPr/>
+        <p:nvPr/>
+      </p:nvGrpSpPr>
+      <p:grpSpPr>
+        <a:xfrm>
+          <a:off x="0" y="0"/>
+          <a:ext cx="0" cy="0"/>
+          <a:chOff x="0" y="0"/>
+          <a:chExt cx="0" cy="0"/>
+        </a:xfrm>
+      </p:grpSpPr>
+      <p:sp>
+        <p:nvSpPr>
+          <p:cNvPr id="2" name="Text 0"/>
+          <p:cNvSpPr/>
+          <p:nvPr/>
+        </p:nvSpPr>
+        <p:spPr>
+          <a:xfrm>
+            <a:off x="0" y="0"/>
+            <a:ext cx="9144000" cy="101501"/>
+          </a:xfrm>
+          <a:prstGeom prst="rect">
+            <a:avLst/>
+          </a:prstGeom>
+          <a:solidFill>
+            <a:srgbClr val="277884"/>
+          </a:solidFill>
+          <a:ln/>
+        </p:spPr>
+        <p:txBody>
+          <a:bodyPr wrap="square" rtlCol="0" anchor="ctr"/>
+          <a:lstStyle/>
+          <a:p>
+            <a:pPr indent="0" marL="0">
+              <a:buNone/>
+            </a:pPr>
+            <a:endParaRPr lang="en-US" dirty="0"/>
+          </a:p>
+        </p:txBody>
+      </p:sp>
+      <p:sp>
+        <p:nvSpPr>
+          <p:cNvPr id="3" name="Text 1"/>
+          <p:cNvSpPr/>
+          <p:nvPr/>
+        </p:nvSpPr>
+        <p:spPr>
+          <a:xfrm>
+            <a:off x="406301" y="457051"/>
+            <a:ext cx="8498026" cy="274290"/>
+          </a:xfrm>
+          <a:prstGeom prst="rect">
+            <a:avLst/>
+          </a:prstGeom>
+          <a:noFill/>
+          <a:ln/>
+        </p:spPr>
+        <p:txBody>
+          <a:bodyPr wrap="square" lIns="0" tIns="0" rIns="0" bIns="0" rtlCol="0" anchor="t"/>
+          <a:lstStyle/>
+          <a:p>
+            <a:pPr algn="l" indent="0" marL="0">
+              <a:lnSpc>
+                <a:spcPts val="2160"/>
+              </a:lnSpc>
+              <a:spcBef>
+                <a:spcPts val="600"/>
+              </a:spcBef>
+              <a:spcAft>
+                <a:spcPts val="800"/>
+              </a:spcAft>
+              <a:buNone/>
+            </a:pPr>
+            <a:r>
+              <a:rPr lang="en-US" sz="1800" b="1" dirty="0">
+                <a:solidFill>
+                  <a:srgbClr val="FE4447"/>
+                </a:solidFill>
+                <a:latin typeface="Georgia" pitchFamily="34" charset="0"/>
+                <a:ea typeface="Georgia" pitchFamily="34" charset="-122"/>
+                <a:cs typeface="Georgia" pitchFamily="34" charset="-120"/>
+              </a:rPr>
+              <a:t>Citation(s) used</a:t>
+            </a:r>
+            <a:endParaRPr lang="en-US" sz="1800" dirty="0"/>
+          </a:p>
+        </p:txBody>
+      </p:sp>
+      <p:sp>
+        <p:nvSpPr>
+          <p:cNvPr id="4" name="Text 2"/>
+          <p:cNvSpPr/>
+          <p:nvPr/>
+        </p:nvSpPr>
+        <p:spPr>
+          <a:xfrm>
+            <a:off x="634901" y="883593"/>
+            <a:ext cx="8102798" cy="525661"/>
+          </a:xfrm>
+          <a:prstGeom prst="rect">
+            <a:avLst/>
+          </a:prstGeom>
+          <a:noFill/>
+          <a:ln/>
+        </p:spPr>
+        <p:txBody>
+          <a:bodyPr wrap="square" lIns="0" tIns="0" rIns="0" bIns="0" rtlCol="0" anchor="t"/>
+          <a:lstStyle/>
+          <a:p>
+            <a:pPr algn="l" marL="342900" indent="-342900">
+              <a:lnSpc>
+                <a:spcPts val="1620"/>
+              </a:lnSpc>
+              <a:spcAft>
+                <a:spcPts val="300"/>
+              </a:spcAft>
+              <a:buSzPct val="100000"/>
+              <a:buChar char="•"/>
+            </a:pPr>
+            <a:r>
+              <a:rPr lang="en-US" sz="1200" dirty="0">
+                <a:solidFill>
+                  <a:srgbClr val="1C2833"/>
+                </a:solidFill>
+                <a:latin typeface="Arial" pitchFamily="34" charset="0"/>
+                <a:ea typeface="Arial" pitchFamily="34" charset="-122"/>
+                <a:cs typeface="Arial" pitchFamily="34" charset="-120"/>
+              </a:rPr>
+              <a:t>Caraka Saṃhitā Sūtra-sthāna ch. 26 — Sharma (1981) translation.</a:t>
+            </a:r>
+            <a:endParaRPr lang="en-US" sz="1200" dirty="0"/>
+          </a:p>
+          <a:p>
+            <a:pPr algn="l" marL="342900" indent="-342900">
+              <a:lnSpc>
+                <a:spcPts val="1620"/>
+              </a:lnSpc>
+              <a:spcAft>
+                <a:spcPts val="300"/>
+              </a:spcAft>
+              <a:buSzPct val="100000"/>
+              <a:buChar char="•"/>
+            </a:pPr>
+            <a:r>
+              <a:rPr lang="en-US" sz="1200" dirty="0">
+                <a:solidFill>
+                  <a:srgbClr val="1C2833"/>
+                </a:solidFill>
+                <a:latin typeface="Arial" pitchFamily="34" charset="0"/>
+                <a:ea typeface="Arial" pitchFamily="34" charset="-122"/>
+                <a:cs typeface="Arial" pitchFamily="34" charset="-120"/>
+              </a:rPr>
+              <a:t>Wujastyk (2003) on the six tastes.</a:t>
             </a:r>
             <a:endParaRPr lang="en-US" sz="1200" dirty="0"/>
           </a:p>
@@ -3020,7 +4753,7 @@
                 <a:ea typeface="Georgia" pitchFamily="34" charset="-122"/>
                 <a:cs typeface="Georgia" pitchFamily="34" charset="-120"/>
               </a:rPr>
-              <a:t>Materials</a:t>
+              <a:t>Learning objective</a:t>
             </a:r>
             <a:endParaRPr lang="en-US" sz="1800" dirty="0"/>
           </a:p>
@@ -3068,7 +4801,53 @@
                 <a:ea typeface="Arial" pitchFamily="34" charset="-122"/>
                 <a:cs typeface="Arial" pitchFamily="34" charset="-120"/>
               </a:rPr>
-              <a:t>– 6 taste samples if available (salt for salty, lemon for sour, jaggery for sweet, mint for bitter, ginger for pungent, raw banana or persimmon for astringent) – Whiteboard</a:t>
+              <a:t>Students name the six tastes (</a:t>
+            </a:r>
+            <a:pPr algn="l" indent="0" marL="0">
+              <a:lnSpc>
+                <a:spcPts val="1680"/>
+              </a:lnSpc>
+              <a:spcBef>
+                <a:spcPts val="300"/>
+              </a:spcBef>
+              <a:spcAft>
+                <a:spcPts val="300"/>
+              </a:spcAft>
+              <a:buNone/>
+            </a:pPr>
+            <a:r>
+              <a:rPr lang="en-US" sz="1200" i="1" dirty="0">
+                <a:solidFill>
+                  <a:srgbClr val="1C2833"/>
+                </a:solidFill>
+                <a:latin typeface="Arial" pitchFamily="34" charset="0"/>
+                <a:ea typeface="Arial" pitchFamily="34" charset="-122"/>
+                <a:cs typeface="Arial" pitchFamily="34" charset="-120"/>
+              </a:rPr>
+              <a:t>rasa</a:t>
+            </a:r>
+            <a:pPr algn="l" indent="0" marL="0">
+              <a:lnSpc>
+                <a:spcPts val="1680"/>
+              </a:lnSpc>
+              <a:spcBef>
+                <a:spcPts val="300"/>
+              </a:spcBef>
+              <a:spcAft>
+                <a:spcPts val="300"/>
+              </a:spcAft>
+              <a:buNone/>
+            </a:pPr>
+            <a:r>
+              <a:rPr lang="en-US" sz="1200" dirty="0">
+                <a:solidFill>
+                  <a:srgbClr val="1C2833"/>
+                </a:solidFill>
+                <a:latin typeface="Arial" pitchFamily="34" charset="0"/>
+                <a:ea typeface="Arial" pitchFamily="34" charset="-122"/>
+                <a:cs typeface="Arial" pitchFamily="34" charset="-120"/>
+              </a:rPr>
+              <a:t>) in Ayurveda, the recommended meal-timing principle, and one food pairing tradition recommends avoiding.</a:t>
             </a:r>
             <a:endParaRPr lang="en-US" sz="1200" dirty="0"/>
           </a:p>
@@ -3226,7 +5005,7 @@
                 <a:ea typeface="Georgia" pitchFamily="34" charset="-122"/>
                 <a:cs typeface="Georgia" pitchFamily="34" charset="-120"/>
               </a:rPr>
-              <a:t>Vocabulary</a:t>
+              <a:t>Materials</a:t>
             </a:r>
             <a:endParaRPr lang="en-US" sz="1800" dirty="0"/>
           </a:p>
@@ -3241,7 +5020,7 @@
         <p:spPr>
           <a:xfrm>
             <a:off x="634901" y="883593"/>
-            <a:ext cx="8102798" cy="769441"/>
+            <a:ext cx="8102798" cy="731341"/>
           </a:xfrm>
           <a:prstGeom prst="rect">
             <a:avLst/>
@@ -3264,26 +5043,6 @@
               <a:buChar char="•"/>
             </a:pPr>
             <a:r>
-              <a:rPr lang="en-US" sz="1200" i="1" dirty="0">
-                <a:solidFill>
-                  <a:srgbClr val="1C2833"/>
-                </a:solidFill>
-                <a:latin typeface="Arial" pitchFamily="34" charset="0"/>
-                <a:ea typeface="Arial" pitchFamily="34" charset="-122"/>
-                <a:cs typeface="Arial" pitchFamily="34" charset="-120"/>
-              </a:rPr>
-              <a:t>Ahāra</a:t>
-            </a:r>
-            <a:pPr algn="l" indent="0" marL="0">
-              <a:lnSpc>
-                <a:spcPts val="1620"/>
-              </a:lnSpc>
-              <a:spcAft>
-                <a:spcPts val="300"/>
-              </a:spcAft>
-              <a:buNone/>
-            </a:pPr>
-            <a:r>
               <a:rPr lang="en-US" sz="1200" dirty="0">
                 <a:solidFill>
                   <a:srgbClr val="1C2833"/>
@@ -3292,7 +5051,7 @@
                 <a:ea typeface="Arial" pitchFamily="34" charset="-122"/>
                 <a:cs typeface="Arial" pitchFamily="34" charset="-120"/>
               </a:rPr>
-              <a:t> — food</a:t>
+              <a:t>6 taste samples if available (salt for salty, lemon for sour, jaggery for sweet, mint for bitter, ginger for pungent, raw banana or persimmon for astringent)</a:t>
             </a:r>
             <a:endParaRPr lang="en-US" sz="1200" dirty="0"/>
           </a:p>
@@ -3308,26 +5067,6 @@
               <a:buChar char="•"/>
             </a:pPr>
             <a:r>
-              <a:rPr lang="en-US" sz="1200" i="1" dirty="0">
-                <a:solidFill>
-                  <a:srgbClr val="1C2833"/>
-                </a:solidFill>
-                <a:latin typeface="Arial" pitchFamily="34" charset="0"/>
-                <a:ea typeface="Arial" pitchFamily="34" charset="-122"/>
-                <a:cs typeface="Arial" pitchFamily="34" charset="-120"/>
-              </a:rPr>
-              <a:t>Rasa</a:t>
-            </a:r>
-            <a:pPr algn="l" indent="0" marL="0">
-              <a:lnSpc>
-                <a:spcPts val="1620"/>
-              </a:lnSpc>
-              <a:spcAft>
-                <a:spcPts val="300"/>
-              </a:spcAft>
-              <a:buNone/>
-            </a:pPr>
-            <a:r>
               <a:rPr lang="en-US" sz="1200" dirty="0">
                 <a:solidFill>
                   <a:srgbClr val="1C2833"/>
@@ -3336,51 +5075,7 @@
                 <a:ea typeface="Arial" pitchFamily="34" charset="-122"/>
                 <a:cs typeface="Arial" pitchFamily="34" charset="-120"/>
               </a:rPr>
-              <a:t> — taste (also: essence)</a:t>
-            </a:r>
-            <a:endParaRPr lang="en-US" sz="1200" dirty="0"/>
-          </a:p>
-          <a:p>
-            <a:pPr algn="l" marL="342900" indent="-342900">
-              <a:lnSpc>
-                <a:spcPts val="1620"/>
-              </a:lnSpc>
-              <a:spcAft>
-                <a:spcPts val="300"/>
-              </a:spcAft>
-              <a:buSzPct val="100000"/>
-              <a:buChar char="•"/>
-            </a:pPr>
-            <a:r>
-              <a:rPr lang="en-US" sz="1200" i="1" dirty="0">
-                <a:solidFill>
-                  <a:srgbClr val="1C2833"/>
-                </a:solidFill>
-                <a:latin typeface="Arial" pitchFamily="34" charset="0"/>
-                <a:ea typeface="Arial" pitchFamily="34" charset="-122"/>
-                <a:cs typeface="Arial" pitchFamily="34" charset="-120"/>
-              </a:rPr>
-              <a:t>Madhura, amla, lavaṇa, kaṭu, tikta, kaṣāya</a:t>
-            </a:r>
-            <a:pPr algn="l" indent="0" marL="0">
-              <a:lnSpc>
-                <a:spcPts val="1620"/>
-              </a:lnSpc>
-              <a:spcAft>
-                <a:spcPts val="300"/>
-              </a:spcAft>
-              <a:buNone/>
-            </a:pPr>
-            <a:r>
-              <a:rPr lang="en-US" sz="1200" dirty="0">
-                <a:solidFill>
-                  <a:srgbClr val="1C2833"/>
-                </a:solidFill>
-                <a:latin typeface="Arial" pitchFamily="34" charset="0"/>
-                <a:ea typeface="Arial" pitchFamily="34" charset="-122"/>
-                <a:cs typeface="Arial" pitchFamily="34" charset="-120"/>
-              </a:rPr>
-              <a:t> — sweet, sour, salty, pungent, bitter, astringent</a:t>
+              <a:t>Whiteboard</a:t>
             </a:r>
             <a:endParaRPr lang="en-US" sz="1200" dirty="0"/>
           </a:p>
@@ -3538,7 +5233,7 @@
                 <a:ea typeface="Georgia" pitchFamily="34" charset="-122"/>
                 <a:cs typeface="Georgia" pitchFamily="34" charset="-120"/>
               </a:rPr>
-              <a:t>Flow</a:t>
+              <a:t>Vocabulary</a:t>
             </a:r>
             <a:endParaRPr lang="en-US" sz="1800" dirty="0"/>
           </a:p>
@@ -3547,6 +5242,160 @@
       <p:sp>
         <p:nvSpPr>
           <p:cNvPr id="4" name="Text 2"/>
+          <p:cNvSpPr/>
+          <p:nvPr/>
+        </p:nvSpPr>
+        <p:spPr>
+          <a:xfrm>
+            <a:off x="634901" y="883593"/>
+            <a:ext cx="8102798" cy="769441"/>
+          </a:xfrm>
+          <a:prstGeom prst="rect">
+            <a:avLst/>
+          </a:prstGeom>
+          <a:noFill/>
+          <a:ln/>
+        </p:spPr>
+        <p:txBody>
+          <a:bodyPr wrap="square" lIns="0" tIns="0" rIns="0" bIns="0" rtlCol="0" anchor="t"/>
+          <a:lstStyle/>
+          <a:p>
+            <a:pPr algn="l" marL="342900" indent="-342900">
+              <a:lnSpc>
+                <a:spcPts val="1620"/>
+              </a:lnSpc>
+              <a:spcAft>
+                <a:spcPts val="300"/>
+              </a:spcAft>
+              <a:buSzPct val="100000"/>
+              <a:buChar char="•"/>
+            </a:pPr>
+            <a:r>
+              <a:rPr lang="en-US" sz="1200" i="1" dirty="0">
+                <a:solidFill>
+                  <a:srgbClr val="1C2833"/>
+                </a:solidFill>
+                <a:latin typeface="Arial" pitchFamily="34" charset="0"/>
+                <a:ea typeface="Arial" pitchFamily="34" charset="-122"/>
+                <a:cs typeface="Arial" pitchFamily="34" charset="-120"/>
+              </a:rPr>
+              <a:t>Ahāra</a:t>
+            </a:r>
+            <a:pPr algn="l" indent="0" marL="0">
+              <a:lnSpc>
+                <a:spcPts val="1620"/>
+              </a:lnSpc>
+              <a:spcAft>
+                <a:spcPts val="300"/>
+              </a:spcAft>
+              <a:buNone/>
+            </a:pPr>
+            <a:r>
+              <a:rPr lang="en-US" sz="1200" dirty="0">
+                <a:solidFill>
+                  <a:srgbClr val="1C2833"/>
+                </a:solidFill>
+                <a:latin typeface="Arial" pitchFamily="34" charset="0"/>
+                <a:ea typeface="Arial" pitchFamily="34" charset="-122"/>
+                <a:cs typeface="Arial" pitchFamily="34" charset="-120"/>
+              </a:rPr>
+              <a:t> — food</a:t>
+            </a:r>
+            <a:endParaRPr lang="en-US" sz="1200" dirty="0"/>
+          </a:p>
+          <a:p>
+            <a:pPr algn="l" marL="342900" indent="-342900">
+              <a:lnSpc>
+                <a:spcPts val="1620"/>
+              </a:lnSpc>
+              <a:spcAft>
+                <a:spcPts val="300"/>
+              </a:spcAft>
+              <a:buSzPct val="100000"/>
+              <a:buChar char="•"/>
+            </a:pPr>
+            <a:r>
+              <a:rPr lang="en-US" sz="1200" i="1" dirty="0">
+                <a:solidFill>
+                  <a:srgbClr val="1C2833"/>
+                </a:solidFill>
+                <a:latin typeface="Arial" pitchFamily="34" charset="0"/>
+                <a:ea typeface="Arial" pitchFamily="34" charset="-122"/>
+                <a:cs typeface="Arial" pitchFamily="34" charset="-120"/>
+              </a:rPr>
+              <a:t>Rasa</a:t>
+            </a:r>
+            <a:pPr algn="l" indent="0" marL="0">
+              <a:lnSpc>
+                <a:spcPts val="1620"/>
+              </a:lnSpc>
+              <a:spcAft>
+                <a:spcPts val="300"/>
+              </a:spcAft>
+              <a:buNone/>
+            </a:pPr>
+            <a:r>
+              <a:rPr lang="en-US" sz="1200" dirty="0">
+                <a:solidFill>
+                  <a:srgbClr val="1C2833"/>
+                </a:solidFill>
+                <a:latin typeface="Arial" pitchFamily="34" charset="0"/>
+                <a:ea typeface="Arial" pitchFamily="34" charset="-122"/>
+                <a:cs typeface="Arial" pitchFamily="34" charset="-120"/>
+              </a:rPr>
+              <a:t> — taste (also: essence)</a:t>
+            </a:r>
+            <a:endParaRPr lang="en-US" sz="1200" dirty="0"/>
+          </a:p>
+          <a:p>
+            <a:pPr algn="l" marL="342900" indent="-342900">
+              <a:lnSpc>
+                <a:spcPts val="1620"/>
+              </a:lnSpc>
+              <a:spcAft>
+                <a:spcPts val="300"/>
+              </a:spcAft>
+              <a:buSzPct val="100000"/>
+              <a:buChar char="•"/>
+            </a:pPr>
+            <a:r>
+              <a:rPr lang="en-US" sz="1200" i="1" dirty="0">
+                <a:solidFill>
+                  <a:srgbClr val="1C2833"/>
+                </a:solidFill>
+                <a:latin typeface="Arial" pitchFamily="34" charset="0"/>
+                <a:ea typeface="Arial" pitchFamily="34" charset="-122"/>
+                <a:cs typeface="Arial" pitchFamily="34" charset="-120"/>
+              </a:rPr>
+              <a:t>Madhura, amla, lavaṇa, kaṭu, tikta, kaṣāya</a:t>
+            </a:r>
+            <a:pPr algn="l" indent="0" marL="0">
+              <a:lnSpc>
+                <a:spcPts val="1620"/>
+              </a:lnSpc>
+              <a:spcAft>
+                <a:spcPts val="300"/>
+              </a:spcAft>
+              <a:buNone/>
+            </a:pPr>
+            <a:r>
+              <a:rPr lang="en-US" sz="1200" dirty="0">
+                <a:solidFill>
+                  <a:srgbClr val="1C2833"/>
+                </a:solidFill>
+                <a:latin typeface="Arial" pitchFamily="34" charset="0"/>
+                <a:ea typeface="Arial" pitchFamily="34" charset="-122"/>
+                <a:cs typeface="Arial" pitchFamily="34" charset="-120"/>
+              </a:rPr>
+              <a:t> — sweet, sour, salty, pungent, bitter, astringent</a:t>
+            </a:r>
+            <a:endParaRPr lang="en-US" sz="1200" dirty="0"/>
+          </a:p>
+        </p:txBody>
+      </p:sp>
+      <p:sp>
+        <p:nvSpPr>
+          <p:cNvPr id="5" name="Text 3"/>
           <p:cNvSpPr/>
           <p:nvPr/>
         </p:nvSpPr>
@@ -3696,7 +5545,7 @@
                 <a:ea typeface="Georgia" pitchFamily="34" charset="-122"/>
                 <a:cs typeface="Georgia" pitchFamily="34" charset="-120"/>
               </a:rPr>
-              <a:t>Warm-up (5 min)</a:t>
+              <a:t>Flow</a:t>
             </a:r>
             <a:endParaRPr lang="en-US" sz="1800" dirty="0"/>
           </a:p>
@@ -3705,54 +5554,6 @@
       <p:sp>
         <p:nvSpPr>
           <p:cNvPr id="4" name="Text 2"/>
-          <p:cNvSpPr/>
-          <p:nvPr/>
-        </p:nvSpPr>
-        <p:spPr>
-          <a:xfrm>
-            <a:off x="406301" y="870942"/>
-            <a:ext cx="8498026" cy="213271"/>
-          </a:xfrm>
-          <a:prstGeom prst="rect">
-            <a:avLst/>
-          </a:prstGeom>
-          <a:noFill/>
-          <a:ln/>
-        </p:spPr>
-        <p:txBody>
-          <a:bodyPr wrap="square" lIns="0" tIns="0" rIns="0" bIns="0" rtlCol="0" anchor="t"/>
-          <a:lstStyle/>
-          <a:p>
-            <a:pPr algn="l" indent="0" marL="0">
-              <a:lnSpc>
-                <a:spcPts val="1680"/>
-              </a:lnSpc>
-              <a:spcBef>
-                <a:spcPts val="300"/>
-              </a:spcBef>
-              <a:spcAft>
-                <a:spcPts val="300"/>
-              </a:spcAft>
-              <a:buNone/>
-            </a:pPr>
-            <a:r>
-              <a:rPr lang="en-US" sz="1200" dirty="0">
-                <a:solidFill>
-                  <a:srgbClr val="1C2833"/>
-                </a:solidFill>
-                <a:latin typeface="Arial" pitchFamily="34" charset="0"/>
-                <a:ea typeface="Arial" pitchFamily="34" charset="-122"/>
-                <a:cs typeface="Arial" pitchFamily="34" charset="-120"/>
-              </a:rPr>
-              <a:t>Daily prompt + recall: dinacharya principle.</a:t>
-            </a:r>
-            <a:endParaRPr lang="en-US" sz="1200" dirty="0"/>
-          </a:p>
-        </p:txBody>
-      </p:sp>
-      <p:sp>
-        <p:nvSpPr>
-          <p:cNvPr id="5" name="Text 3"/>
           <p:cNvSpPr/>
           <p:nvPr/>
         </p:nvSpPr>
@@ -3902,7 +5703,7 @@
                 <a:ea typeface="Georgia" pitchFamily="34" charset="-122"/>
                 <a:cs typeface="Georgia" pitchFamily="34" charset="-120"/>
               </a:rPr>
-              <a:t>Core (25 min)</a:t>
+              <a:t>Warm-up (5 min)</a:t>
             </a:r>
             <a:endParaRPr lang="en-US" sz="1800" dirty="0"/>
           </a:p>
@@ -3916,8 +5717,8 @@
         </p:nvSpPr>
         <p:spPr>
           <a:xfrm>
-            <a:off x="634901" y="883593"/>
-            <a:ext cx="8102798" cy="281880"/>
+            <a:off x="406301" y="870942"/>
+            <a:ext cx="8498026" cy="213271"/>
           </a:xfrm>
           <a:prstGeom prst="rect">
             <a:avLst/>
@@ -3929,31 +5730,13 @@
           <a:bodyPr wrap="square" lIns="0" tIns="0" rIns="0" bIns="0" rtlCol="0" anchor="t"/>
           <a:lstStyle/>
           <a:p>
-            <a:pPr algn="l" marL="342900" indent="-342900">
-              <a:lnSpc>
-                <a:spcPts val="1620"/>
-              </a:lnSpc>
-              <a:spcAft>
-                <a:spcPts val="300"/>
-              </a:spcAft>
-              <a:buSzPct val="100000"/>
-              <a:buChar char="•"/>
-            </a:pPr>
-            <a:r>
-              <a:rPr lang="en-US" sz="1200" b="1" dirty="0">
-                <a:solidFill>
-                  <a:srgbClr val="1C2833"/>
-                </a:solidFill>
-                <a:latin typeface="Arial" pitchFamily="34" charset="0"/>
-                <a:ea typeface="Arial" pitchFamily="34" charset="-122"/>
-                <a:cs typeface="Arial" pitchFamily="34" charset="-120"/>
-              </a:rPr>
-              <a:t>The Six Tastes</a:t>
-            </a:r>
             <a:pPr algn="l" indent="0" marL="0">
               <a:lnSpc>
-                <a:spcPts val="1620"/>
-              </a:lnSpc>
+                <a:spcPts val="1680"/>
+              </a:lnSpc>
+              <a:spcBef>
+                <a:spcPts val="300"/>
+              </a:spcBef>
               <a:spcAft>
                 <a:spcPts val="300"/>
               </a:spcAft>
@@ -3968,7 +5751,7 @@
                 <a:ea typeface="Arial" pitchFamily="34" charset="-122"/>
                 <a:cs typeface="Arial" pitchFamily="34" charset="-120"/>
               </a:rPr>
-              <a:t> (rasa):</a:t>
+              <a:t>Daily prompt + recall: dinacharya principle.</a:t>
             </a:r>
             <a:endParaRPr lang="en-US" sz="1200" dirty="0"/>
           </a:p>
@@ -3982,703 +5765,7 @@
         </p:nvSpPr>
         <p:spPr>
           <a:xfrm>
-            <a:off x="406301" y="1254323"/>
-            <a:ext cx="8498026" cy="213271"/>
-          </a:xfrm>
-          <a:prstGeom prst="rect">
-            <a:avLst/>
-          </a:prstGeom>
-          <a:noFill/>
-          <a:ln/>
-        </p:spPr>
-        <p:txBody>
-          <a:bodyPr wrap="square" lIns="0" tIns="0" rIns="0" bIns="0" rtlCol="0" anchor="t"/>
-          <a:lstStyle/>
-          <a:p>
-            <a:pPr algn="l" indent="0" marL="0">
-              <a:lnSpc>
-                <a:spcPts val="1680"/>
-              </a:lnSpc>
-              <a:spcBef>
-                <a:spcPts val="300"/>
-              </a:spcBef>
-              <a:spcAft>
-                <a:spcPts val="300"/>
-              </a:spcAft>
-              <a:buNone/>
-            </a:pPr>
-            <a:r>
-              <a:rPr lang="en-US" sz="1200" i="1" dirty="0">
-                <a:solidFill>
-                  <a:srgbClr val="1C2833"/>
-                </a:solidFill>
-                <a:latin typeface="Arial" pitchFamily="34" charset="0"/>
-                <a:ea typeface="Arial" pitchFamily="34" charset="-122"/>
-                <a:cs typeface="Arial" pitchFamily="34" charset="-120"/>
-              </a:rPr>
-              <a:t>Each row: Sanskrit · English · Examples · Dosha effect.</a:t>
-            </a:r>
-            <a:endParaRPr lang="en-US" sz="1200" dirty="0"/>
-          </a:p>
-        </p:txBody>
-      </p:sp>
-      <p:sp>
-        <p:nvSpPr>
-          <p:cNvPr id="6" name="Text 4"/>
-          <p:cNvSpPr/>
-          <p:nvPr/>
-        </p:nvSpPr>
-        <p:spPr>
-          <a:xfrm>
-            <a:off x="634901" y="1556445"/>
-            <a:ext cx="8102798" cy="1500783"/>
-          </a:xfrm>
-          <a:prstGeom prst="rect">
-            <a:avLst/>
-          </a:prstGeom>
-          <a:noFill/>
-          <a:ln/>
-        </p:spPr>
-        <p:txBody>
-          <a:bodyPr wrap="square" lIns="0" tIns="0" rIns="0" bIns="0" rtlCol="0" anchor="t"/>
-          <a:lstStyle/>
-          <a:p>
-            <a:pPr algn="l" marL="342900" indent="-342900">
-              <a:lnSpc>
-                <a:spcPts val="1620"/>
-              </a:lnSpc>
-              <a:spcAft>
-                <a:spcPts val="300"/>
-              </a:spcAft>
-              <a:buSzPct val="100000"/>
-              <a:buChar char="•"/>
-            </a:pPr>
-            <a:r>
-              <a:rPr lang="en-US" sz="1200" b="1" dirty="0">
-                <a:solidFill>
-                  <a:srgbClr val="1C2833"/>
-                </a:solidFill>
-                <a:latin typeface="Arial" pitchFamily="34" charset="0"/>
-                <a:ea typeface="Arial" pitchFamily="34" charset="-122"/>
-                <a:cs typeface="Arial" pitchFamily="34" charset="-120"/>
-              </a:rPr>
-              <a:t>Madhura</a:t>
-            </a:r>
-            <a:pPr algn="l" indent="0" marL="0">
-              <a:lnSpc>
-                <a:spcPts val="1620"/>
-              </a:lnSpc>
-              <a:spcAft>
-                <a:spcPts val="300"/>
-              </a:spcAft>
-              <a:buNone/>
-            </a:pPr>
-            <a:r>
-              <a:rPr lang="en-US" sz="1200" dirty="0">
-                <a:solidFill>
-                  <a:srgbClr val="1C2833"/>
-                </a:solidFill>
-                <a:latin typeface="Arial" pitchFamily="34" charset="0"/>
-                <a:ea typeface="Arial" pitchFamily="34" charset="-122"/>
-                <a:cs typeface="Arial" pitchFamily="34" charset="-120"/>
-              </a:rPr>
-              <a:t> — Sweet · Rice, milk, sugar, fruit · ↓ Vāta, ↓ Pitta, ↑ Kapha</a:t>
-            </a:r>
-            <a:endParaRPr lang="en-US" sz="1200" dirty="0"/>
-          </a:p>
-          <a:p>
-            <a:pPr algn="l" marL="342900" indent="-342900">
-              <a:lnSpc>
-                <a:spcPts val="1620"/>
-              </a:lnSpc>
-              <a:spcAft>
-                <a:spcPts val="300"/>
-              </a:spcAft>
-              <a:buSzPct val="100000"/>
-              <a:buChar char="•"/>
-            </a:pPr>
-            <a:r>
-              <a:rPr lang="en-US" sz="1200" b="1" dirty="0">
-                <a:solidFill>
-                  <a:srgbClr val="1C2833"/>
-                </a:solidFill>
-                <a:latin typeface="Arial" pitchFamily="34" charset="0"/>
-                <a:ea typeface="Arial" pitchFamily="34" charset="-122"/>
-                <a:cs typeface="Arial" pitchFamily="34" charset="-120"/>
-              </a:rPr>
-              <a:t>Amla</a:t>
-            </a:r>
-            <a:pPr algn="l" indent="0" marL="0">
-              <a:lnSpc>
-                <a:spcPts val="1620"/>
-              </a:lnSpc>
-              <a:spcAft>
-                <a:spcPts val="300"/>
-              </a:spcAft>
-              <a:buNone/>
-            </a:pPr>
-            <a:r>
-              <a:rPr lang="en-US" sz="1200" dirty="0">
-                <a:solidFill>
-                  <a:srgbClr val="1C2833"/>
-                </a:solidFill>
-                <a:latin typeface="Arial" pitchFamily="34" charset="0"/>
-                <a:ea typeface="Arial" pitchFamily="34" charset="-122"/>
-                <a:cs typeface="Arial" pitchFamily="34" charset="-120"/>
-              </a:rPr>
-              <a:t> — Sour · Citrus, yogurt, vinegar · ↓ Vāta, ↑ Pitta, ↑ Kapha</a:t>
-            </a:r>
-            <a:endParaRPr lang="en-US" sz="1200" dirty="0"/>
-          </a:p>
-          <a:p>
-            <a:pPr algn="l" marL="342900" indent="-342900">
-              <a:lnSpc>
-                <a:spcPts val="1620"/>
-              </a:lnSpc>
-              <a:spcAft>
-                <a:spcPts val="300"/>
-              </a:spcAft>
-              <a:buSzPct val="100000"/>
-              <a:buChar char="•"/>
-            </a:pPr>
-            <a:r>
-              <a:rPr lang="en-US" sz="1200" b="1" dirty="0">
-                <a:solidFill>
-                  <a:srgbClr val="1C2833"/>
-                </a:solidFill>
-                <a:latin typeface="Arial" pitchFamily="34" charset="0"/>
-                <a:ea typeface="Arial" pitchFamily="34" charset="-122"/>
-                <a:cs typeface="Arial" pitchFamily="34" charset="-120"/>
-              </a:rPr>
-              <a:t>Lavaṇa</a:t>
-            </a:r>
-            <a:pPr algn="l" indent="0" marL="0">
-              <a:lnSpc>
-                <a:spcPts val="1620"/>
-              </a:lnSpc>
-              <a:spcAft>
-                <a:spcPts val="300"/>
-              </a:spcAft>
-              <a:buNone/>
-            </a:pPr>
-            <a:r>
-              <a:rPr lang="en-US" sz="1200" dirty="0">
-                <a:solidFill>
-                  <a:srgbClr val="1C2833"/>
-                </a:solidFill>
-                <a:latin typeface="Arial" pitchFamily="34" charset="0"/>
-                <a:ea typeface="Arial" pitchFamily="34" charset="-122"/>
-                <a:cs typeface="Arial" pitchFamily="34" charset="-120"/>
-              </a:rPr>
-              <a:t> — Salty · Salt, sea vegetables · ↓ Vāta, ↑ Pitta, ↑ Kapha</a:t>
-            </a:r>
-            <a:endParaRPr lang="en-US" sz="1200" dirty="0"/>
-          </a:p>
-          <a:p>
-            <a:pPr algn="l" marL="342900" indent="-342900">
-              <a:lnSpc>
-                <a:spcPts val="1620"/>
-              </a:lnSpc>
-              <a:spcAft>
-                <a:spcPts val="300"/>
-              </a:spcAft>
-              <a:buSzPct val="100000"/>
-              <a:buChar char="•"/>
-            </a:pPr>
-            <a:r>
-              <a:rPr lang="en-US" sz="1200" b="1" dirty="0">
-                <a:solidFill>
-                  <a:srgbClr val="1C2833"/>
-                </a:solidFill>
-                <a:latin typeface="Arial" pitchFamily="34" charset="0"/>
-                <a:ea typeface="Arial" pitchFamily="34" charset="-122"/>
-                <a:cs typeface="Arial" pitchFamily="34" charset="-120"/>
-              </a:rPr>
-              <a:t>Kaṭu</a:t>
-            </a:r>
-            <a:pPr algn="l" indent="0" marL="0">
-              <a:lnSpc>
-                <a:spcPts val="1620"/>
-              </a:lnSpc>
-              <a:spcAft>
-                <a:spcPts val="300"/>
-              </a:spcAft>
-              <a:buNone/>
-            </a:pPr>
-            <a:r>
-              <a:rPr lang="en-US" sz="1200" dirty="0">
-                <a:solidFill>
-                  <a:srgbClr val="1C2833"/>
-                </a:solidFill>
-                <a:latin typeface="Arial" pitchFamily="34" charset="0"/>
-                <a:ea typeface="Arial" pitchFamily="34" charset="-122"/>
-                <a:cs typeface="Arial" pitchFamily="34" charset="-120"/>
-              </a:rPr>
-              <a:t> — Pungent · Chili, ginger, garlic · ↑ Vāta, ↑ Pitta, ↓ Kapha</a:t>
-            </a:r>
-            <a:endParaRPr lang="en-US" sz="1200" dirty="0"/>
-          </a:p>
-          <a:p>
-            <a:pPr algn="l" marL="342900" indent="-342900">
-              <a:lnSpc>
-                <a:spcPts val="1620"/>
-              </a:lnSpc>
-              <a:spcAft>
-                <a:spcPts val="300"/>
-              </a:spcAft>
-              <a:buSzPct val="100000"/>
-              <a:buChar char="•"/>
-            </a:pPr>
-            <a:r>
-              <a:rPr lang="en-US" sz="1200" b="1" dirty="0">
-                <a:solidFill>
-                  <a:srgbClr val="1C2833"/>
-                </a:solidFill>
-                <a:latin typeface="Arial" pitchFamily="34" charset="0"/>
-                <a:ea typeface="Arial" pitchFamily="34" charset="-122"/>
-                <a:cs typeface="Arial" pitchFamily="34" charset="-120"/>
-              </a:rPr>
-              <a:t>Tikta</a:t>
-            </a:r>
-            <a:pPr algn="l" indent="0" marL="0">
-              <a:lnSpc>
-                <a:spcPts val="1620"/>
-              </a:lnSpc>
-              <a:spcAft>
-                <a:spcPts val="300"/>
-              </a:spcAft>
-              <a:buNone/>
-            </a:pPr>
-            <a:r>
-              <a:rPr lang="en-US" sz="1200" dirty="0">
-                <a:solidFill>
-                  <a:srgbClr val="1C2833"/>
-                </a:solidFill>
-                <a:latin typeface="Arial" pitchFamily="34" charset="0"/>
-                <a:ea typeface="Arial" pitchFamily="34" charset="-122"/>
-                <a:cs typeface="Arial" pitchFamily="34" charset="-120"/>
-              </a:rPr>
-              <a:t> — Bitter · Bitter gourd, turmeric, neem · ↑ Vāta, ↓ Pitta, ↓ Kapha</a:t>
-            </a:r>
-            <a:endParaRPr lang="en-US" sz="1200" dirty="0"/>
-          </a:p>
-          <a:p>
-            <a:pPr algn="l" marL="342900" indent="-342900">
-              <a:lnSpc>
-                <a:spcPts val="1620"/>
-              </a:lnSpc>
-              <a:spcAft>
-                <a:spcPts val="300"/>
-              </a:spcAft>
-              <a:buSzPct val="100000"/>
-              <a:buChar char="•"/>
-            </a:pPr>
-            <a:r>
-              <a:rPr lang="en-US" sz="1200" b="1" dirty="0">
-                <a:solidFill>
-                  <a:srgbClr val="1C2833"/>
-                </a:solidFill>
-                <a:latin typeface="Arial" pitchFamily="34" charset="0"/>
-                <a:ea typeface="Arial" pitchFamily="34" charset="-122"/>
-                <a:cs typeface="Arial" pitchFamily="34" charset="-120"/>
-              </a:rPr>
-              <a:t>Kaṣāya</a:t>
-            </a:r>
-            <a:pPr algn="l" indent="0" marL="0">
-              <a:lnSpc>
-                <a:spcPts val="1620"/>
-              </a:lnSpc>
-              <a:spcAft>
-                <a:spcPts val="300"/>
-              </a:spcAft>
-              <a:buNone/>
-            </a:pPr>
-            <a:r>
-              <a:rPr lang="en-US" sz="1200" dirty="0">
-                <a:solidFill>
-                  <a:srgbClr val="1C2833"/>
-                </a:solidFill>
-                <a:latin typeface="Arial" pitchFamily="34" charset="0"/>
-                <a:ea typeface="Arial" pitchFamily="34" charset="-122"/>
-                <a:cs typeface="Arial" pitchFamily="34" charset="-120"/>
-              </a:rPr>
-              <a:t> — Astringent · Banana (unripe), pomegranate, beans · ↑ Vāta, ↓ Pitta, ↓ Kapha</a:t>
-            </a:r>
-            <a:endParaRPr lang="en-US" sz="1200" dirty="0"/>
-          </a:p>
-        </p:txBody>
-      </p:sp>
-      <p:sp>
-        <p:nvSpPr>
-          <p:cNvPr id="7" name="Text 5"/>
-          <p:cNvSpPr/>
-          <p:nvPr/>
-        </p:nvSpPr>
-        <p:spPr>
-          <a:xfrm>
-            <a:off x="634901" y="3158728"/>
-            <a:ext cx="8102798" cy="487561"/>
-          </a:xfrm>
-          <a:prstGeom prst="rect">
-            <a:avLst/>
-          </a:prstGeom>
-          <a:noFill/>
-          <a:ln/>
-        </p:spPr>
-        <p:txBody>
-          <a:bodyPr wrap="square" lIns="0" tIns="0" rIns="0" bIns="0" rtlCol="0" anchor="t"/>
-          <a:lstStyle/>
-          <a:p>
-            <a:pPr algn="l" marL="342900" indent="-342900">
-              <a:lnSpc>
-                <a:spcPts val="1620"/>
-              </a:lnSpc>
-              <a:spcAft>
-                <a:spcPts val="300"/>
-              </a:spcAft>
-              <a:buSzPct val="100000"/>
-              <a:buChar char="•"/>
-            </a:pPr>
-            <a:r>
-              <a:rPr lang="en-US" sz="1200" b="1" dirty="0">
-                <a:solidFill>
-                  <a:srgbClr val="1C2833"/>
-                </a:solidFill>
-                <a:latin typeface="Arial" pitchFamily="34" charset="0"/>
-                <a:ea typeface="Arial" pitchFamily="34" charset="-122"/>
-                <a:cs typeface="Arial" pitchFamily="34" charset="-120"/>
-              </a:rPr>
-              <a:t>The principle:</a:t>
-            </a:r>
-            <a:pPr algn="l" indent="0" marL="0">
-              <a:lnSpc>
-                <a:spcPts val="1620"/>
-              </a:lnSpc>
-              <a:spcAft>
-                <a:spcPts val="300"/>
-              </a:spcAft>
-              <a:buNone/>
-            </a:pPr>
-            <a:r>
-              <a:rPr lang="en-US" sz="1200" dirty="0">
-                <a:solidFill>
-                  <a:srgbClr val="1C2833"/>
-                </a:solidFill>
-                <a:latin typeface="Arial" pitchFamily="34" charset="0"/>
-                <a:ea typeface="Arial" pitchFamily="34" charset="-122"/>
-                <a:cs typeface="Arial" pitchFamily="34" charset="-120"/>
-              </a:rPr>
-              <a:t> a balanced meal includes ALL six tastes. Traditional Indian thalis are designed this way — you'll notice rice (sweet), pickle (sour/salty), chili (pungent), bitter gourd or fenugreek (bitter), and a pulse-based dish (astringent).</a:t>
-            </a:r>
-            <a:endParaRPr lang="en-US" sz="1200" dirty="0"/>
-          </a:p>
-        </p:txBody>
-      </p:sp>
-      <p:sp>
-        <p:nvSpPr>
-          <p:cNvPr id="8" name="Text 6"/>
-          <p:cNvSpPr/>
-          <p:nvPr/>
-        </p:nvSpPr>
-        <p:spPr>
-          <a:xfrm>
-            <a:off x="634901" y="3747790"/>
-            <a:ext cx="8102798" cy="281880"/>
-          </a:xfrm>
-          <a:prstGeom prst="rect">
-            <a:avLst/>
-          </a:prstGeom>
-          <a:noFill/>
-          <a:ln/>
-        </p:spPr>
-        <p:txBody>
-          <a:bodyPr wrap="square" lIns="0" tIns="0" rIns="0" bIns="0" rtlCol="0" anchor="t"/>
-          <a:lstStyle/>
-          <a:p>
-            <a:pPr algn="l" marL="342900" indent="-342900">
-              <a:lnSpc>
-                <a:spcPts val="1620"/>
-              </a:lnSpc>
-              <a:spcAft>
-                <a:spcPts val="300"/>
-              </a:spcAft>
-              <a:buSzPct val="100000"/>
-              <a:buChar char="•"/>
-            </a:pPr>
-            <a:r>
-              <a:rPr lang="en-US" sz="1200" b="1" dirty="0">
-                <a:solidFill>
-                  <a:srgbClr val="1C2833"/>
-                </a:solidFill>
-                <a:latin typeface="Arial" pitchFamily="34" charset="0"/>
-                <a:ea typeface="Arial" pitchFamily="34" charset="-122"/>
-                <a:cs typeface="Arial" pitchFamily="34" charset="-120"/>
-              </a:rPr>
-              <a:t>Meal timing:</a:t>
-            </a:r>
-            <a:endParaRPr lang="en-US" sz="1200" dirty="0"/>
-          </a:p>
-        </p:txBody>
-      </p:sp>
-      <p:sp>
-        <p:nvSpPr>
-          <p:cNvPr id="9" name="Text 7"/>
-          <p:cNvSpPr/>
-          <p:nvPr/>
-        </p:nvSpPr>
-        <p:spPr>
-          <a:xfrm>
-            <a:off x="406301" y="4118521"/>
-            <a:ext cx="8498026" cy="426541"/>
-          </a:xfrm>
-          <a:prstGeom prst="rect">
-            <a:avLst/>
-          </a:prstGeom>
-          <a:noFill/>
-          <a:ln/>
-        </p:spPr>
-        <p:txBody>
-          <a:bodyPr wrap="square" lIns="0" tIns="0" rIns="0" bIns="0" rtlCol="0" anchor="t"/>
-          <a:lstStyle/>
-          <a:p>
-            <a:pPr algn="l" indent="0" marL="0">
-              <a:lnSpc>
-                <a:spcPts val="1680"/>
-              </a:lnSpc>
-              <a:spcBef>
-                <a:spcPts val="300"/>
-              </a:spcBef>
-              <a:spcAft>
-                <a:spcPts val="300"/>
-              </a:spcAft>
-              <a:buNone/>
-            </a:pPr>
-            <a:r>
-              <a:rPr lang="en-US" sz="1200" dirty="0">
-                <a:solidFill>
-                  <a:srgbClr val="1C2833"/>
-                </a:solidFill>
-                <a:latin typeface="Arial" pitchFamily="34" charset="0"/>
-                <a:ea typeface="Arial" pitchFamily="34" charset="-122"/>
-                <a:cs typeface="Arial" pitchFamily="34" charset="-120"/>
-              </a:rPr>
-              <a:t>– Largest meal at midday (Pitta peak — digestion strongest).    – Light dinner before sunset (ideally).    – No heavy meal close to bedtime.</a:t>
-            </a:r>
-            <a:endParaRPr lang="en-US" sz="1200" dirty="0"/>
-          </a:p>
-        </p:txBody>
-      </p:sp>
-      <p:sp>
-        <p:nvSpPr>
-          <p:cNvPr id="10" name="Text 8"/>
-          <p:cNvSpPr/>
-          <p:nvPr/>
-        </p:nvSpPr>
-        <p:spPr>
-          <a:xfrm>
-            <a:off x="634901" y="4633913"/>
-            <a:ext cx="8102798" cy="281880"/>
-          </a:xfrm>
-          <a:prstGeom prst="rect">
-            <a:avLst/>
-          </a:prstGeom>
-          <a:noFill/>
-          <a:ln/>
-        </p:spPr>
-        <p:txBody>
-          <a:bodyPr wrap="square" lIns="0" tIns="0" rIns="0" bIns="0" rtlCol="0" anchor="t"/>
-          <a:lstStyle/>
-          <a:p>
-            <a:pPr algn="l" marL="342900" indent="-342900">
-              <a:lnSpc>
-                <a:spcPts val="1620"/>
-              </a:lnSpc>
-              <a:spcAft>
-                <a:spcPts val="300"/>
-              </a:spcAft>
-              <a:buSzPct val="100000"/>
-              <a:buChar char="•"/>
-            </a:pPr>
-            <a:r>
-              <a:rPr lang="en-US" sz="1200" b="1" dirty="0">
-                <a:solidFill>
-                  <a:srgbClr val="1C2833"/>
-                </a:solidFill>
-                <a:latin typeface="Arial" pitchFamily="34" charset="0"/>
-                <a:ea typeface="Arial" pitchFamily="34" charset="-122"/>
-                <a:cs typeface="Arial" pitchFamily="34" charset="-120"/>
-              </a:rPr>
-              <a:t>One food rule:</a:t>
-            </a:r>
-            <a:pPr algn="l" indent="0" marL="0">
-              <a:lnSpc>
-                <a:spcPts val="1620"/>
-              </a:lnSpc>
-              <a:spcAft>
-                <a:spcPts val="300"/>
-              </a:spcAft>
-              <a:buNone/>
-            </a:pPr>
-            <a:r>
-              <a:rPr lang="en-US" sz="1200" dirty="0">
-                <a:solidFill>
-                  <a:srgbClr val="1C2833"/>
-                </a:solidFill>
-                <a:latin typeface="Arial" pitchFamily="34" charset="0"/>
-                <a:ea typeface="Arial" pitchFamily="34" charset="-122"/>
-                <a:cs typeface="Arial" pitchFamily="34" charset="-120"/>
-              </a:rPr>
-              <a:t> </a:t>
-            </a:r>
-            <a:pPr algn="l" indent="0" marL="0">
-              <a:lnSpc>
-                <a:spcPts val="1620"/>
-              </a:lnSpc>
-              <a:spcAft>
-                <a:spcPts val="300"/>
-              </a:spcAft>
-              <a:buNone/>
-            </a:pPr>
-            <a:r>
-              <a:rPr lang="en-US" sz="1200" i="1" dirty="0">
-                <a:solidFill>
-                  <a:srgbClr val="1C2833"/>
-                </a:solidFill>
-                <a:latin typeface="Arial" pitchFamily="34" charset="0"/>
-                <a:ea typeface="Arial" pitchFamily="34" charset="-122"/>
-                <a:cs typeface="Arial" pitchFamily="34" charset="-120"/>
-              </a:rPr>
-              <a:t>Virrudha-ahāra</a:t>
-            </a:r>
-            <a:pPr algn="l" indent="0" marL="0">
-              <a:lnSpc>
-                <a:spcPts val="1620"/>
-              </a:lnSpc>
-              <a:spcAft>
-                <a:spcPts val="300"/>
-              </a:spcAft>
-              <a:buNone/>
-            </a:pPr>
-            <a:r>
-              <a:rPr lang="en-US" sz="1200" dirty="0">
-                <a:solidFill>
-                  <a:srgbClr val="1C2833"/>
-                </a:solidFill>
-                <a:latin typeface="Arial" pitchFamily="34" charset="0"/>
-                <a:ea typeface="Arial" pitchFamily="34" charset="-122"/>
-                <a:cs typeface="Arial" pitchFamily="34" charset="-120"/>
-              </a:rPr>
-              <a:t> — incompatible food combinations. Classical examples:</a:t>
-            </a:r>
-            <a:endParaRPr lang="en-US" sz="1200" dirty="0"/>
-          </a:p>
-        </p:txBody>
-      </p:sp>
-      <p:sp>
-        <p:nvSpPr>
-          <p:cNvPr id="11" name="Text 9"/>
-          <p:cNvSpPr/>
-          <p:nvPr/>
-        </p:nvSpPr>
-        <p:spPr>
-          <a:xfrm>
-            <a:off x="406301" y="5004643"/>
-            <a:ext cx="8498026" cy="426541"/>
-          </a:xfrm>
-          <a:prstGeom prst="rect">
-            <a:avLst/>
-          </a:prstGeom>
-          <a:noFill/>
-          <a:ln/>
-        </p:spPr>
-        <p:txBody>
-          <a:bodyPr wrap="square" lIns="0" tIns="0" rIns="0" bIns="0" rtlCol="0" anchor="t"/>
-          <a:lstStyle/>
-          <a:p>
-            <a:pPr algn="l" indent="0" marL="0">
-              <a:lnSpc>
-                <a:spcPts val="1680"/>
-              </a:lnSpc>
-              <a:spcBef>
-                <a:spcPts val="300"/>
-              </a:spcBef>
-              <a:spcAft>
-                <a:spcPts val="300"/>
-              </a:spcAft>
-              <a:buNone/>
-            </a:pPr>
-            <a:r>
-              <a:rPr lang="en-US" sz="1200" dirty="0">
-                <a:solidFill>
-                  <a:srgbClr val="1C2833"/>
-                </a:solidFill>
-                <a:latin typeface="Arial" pitchFamily="34" charset="0"/>
-                <a:ea typeface="Arial" pitchFamily="34" charset="-122"/>
-                <a:cs typeface="Arial" pitchFamily="34" charset="-120"/>
-              </a:rPr>
-              <a:t>– Milk + fish (heating + cooling combination).    – Milk + sour fruit (digestive disturbance).    – Honey heated above body temperature (changes its qualities).</a:t>
-            </a:r>
-            <a:endParaRPr lang="en-US" sz="1200" dirty="0"/>
-          </a:p>
-        </p:txBody>
-      </p:sp>
-      <p:sp>
-        <p:nvSpPr>
-          <p:cNvPr id="12" name="Text 10"/>
-          <p:cNvSpPr/>
-          <p:nvPr/>
-        </p:nvSpPr>
-        <p:spPr>
-          <a:xfrm>
-            <a:off x="406301" y="5507385"/>
-            <a:ext cx="8498026" cy="426541"/>
-          </a:xfrm>
-          <a:prstGeom prst="rect">
-            <a:avLst/>
-          </a:prstGeom>
-          <a:noFill/>
-          <a:ln/>
-        </p:spPr>
-        <p:txBody>
-          <a:bodyPr wrap="square" lIns="0" tIns="0" rIns="0" bIns="0" rtlCol="0" anchor="t"/>
-          <a:lstStyle/>
-          <a:p>
-            <a:pPr algn="l" indent="0" marL="0">
-              <a:lnSpc>
-                <a:spcPts val="1680"/>
-              </a:lnSpc>
-              <a:spcBef>
-                <a:spcPts val="300"/>
-              </a:spcBef>
-              <a:spcAft>
-                <a:spcPts val="300"/>
-              </a:spcAft>
-              <a:buNone/>
-            </a:pPr>
-            <a:r>
-              <a:rPr lang="en-US" sz="1200" dirty="0">
-                <a:solidFill>
-                  <a:srgbClr val="1C2833"/>
-                </a:solidFill>
-                <a:latin typeface="Arial" pitchFamily="34" charset="0"/>
-                <a:ea typeface="Arial" pitchFamily="34" charset="-122"/>
-                <a:cs typeface="Arial" pitchFamily="34" charset="-120"/>
-              </a:rPr>
-              <a:t>Note: some virrudha-ahāra rules have modern evidence (e.g. some lactose-fruit-acid interactions); others are traditional with limited validation.</a:t>
-            </a:r>
-            <a:endParaRPr lang="en-US" sz="1200" dirty="0"/>
-          </a:p>
-        </p:txBody>
-      </p:sp>
-      <p:sp>
-        <p:nvSpPr>
-          <p:cNvPr id="13" name="Text 11"/>
-          <p:cNvSpPr/>
-          <p:nvPr/>
-        </p:nvSpPr>
-        <p:spPr>
-          <a:xfrm>
-            <a:off x="406301" y="6086326"/>
+            <a:off x="406301" y="4434929"/>
             <a:ext cx="8498026" cy="213271"/>
           </a:xfrm>
           <a:prstGeom prst="rect">
@@ -4822,7 +5909,7 @@
                 <a:ea typeface="Georgia" pitchFamily="34" charset="-122"/>
                 <a:cs typeface="Georgia" pitchFamily="34" charset="-120"/>
               </a:rPr>
-              <a:t>Activity (10 min) — Taste tour</a:t>
+              <a:t>Core (25 min)</a:t>
             </a:r>
             <a:endParaRPr lang="en-US" sz="1800" dirty="0"/>
           </a:p>
@@ -4836,7 +5923,73 @@
         </p:nvSpPr>
         <p:spPr>
           <a:xfrm>
-            <a:off x="406301" y="870942"/>
+            <a:off x="634901" y="883593"/>
+            <a:ext cx="8102798" cy="281880"/>
+          </a:xfrm>
+          <a:prstGeom prst="rect">
+            <a:avLst/>
+          </a:prstGeom>
+          <a:noFill/>
+          <a:ln/>
+        </p:spPr>
+        <p:txBody>
+          <a:bodyPr wrap="square" lIns="0" tIns="0" rIns="0" bIns="0" rtlCol="0" anchor="t"/>
+          <a:lstStyle/>
+          <a:p>
+            <a:pPr algn="l" marL="342900" indent="-342900">
+              <a:lnSpc>
+                <a:spcPts val="1620"/>
+              </a:lnSpc>
+              <a:spcAft>
+                <a:spcPts val="300"/>
+              </a:spcAft>
+              <a:buSzPct val="100000"/>
+              <a:buChar char="•"/>
+            </a:pPr>
+            <a:r>
+              <a:rPr lang="en-US" sz="1200" b="1" dirty="0">
+                <a:solidFill>
+                  <a:srgbClr val="1C2833"/>
+                </a:solidFill>
+                <a:latin typeface="Arial" pitchFamily="34" charset="0"/>
+                <a:ea typeface="Arial" pitchFamily="34" charset="-122"/>
+                <a:cs typeface="Arial" pitchFamily="34" charset="-120"/>
+              </a:rPr>
+              <a:t>The Six Tastes</a:t>
+            </a:r>
+            <a:pPr algn="l" indent="0" marL="0">
+              <a:lnSpc>
+                <a:spcPts val="1620"/>
+              </a:lnSpc>
+              <a:spcAft>
+                <a:spcPts val="300"/>
+              </a:spcAft>
+              <a:buNone/>
+            </a:pPr>
+            <a:r>
+              <a:rPr lang="en-US" sz="1200" dirty="0">
+                <a:solidFill>
+                  <a:srgbClr val="1C2833"/>
+                </a:solidFill>
+                <a:latin typeface="Arial" pitchFamily="34" charset="0"/>
+                <a:ea typeface="Arial" pitchFamily="34" charset="-122"/>
+                <a:cs typeface="Arial" pitchFamily="34" charset="-120"/>
+              </a:rPr>
+              <a:t> (rasa):</a:t>
+            </a:r>
+            <a:endParaRPr lang="en-US" sz="1200" dirty="0"/>
+          </a:p>
+        </p:txBody>
+      </p:sp>
+      <p:sp>
+        <p:nvSpPr>
+          <p:cNvPr id="5" name="Text 3"/>
+          <p:cNvSpPr/>
+          <p:nvPr/>
+        </p:nvSpPr>
+        <p:spPr>
+          <a:xfrm>
+            <a:off x="406301" y="1254323"/>
             <a:ext cx="8498026" cy="213271"/>
           </a:xfrm>
           <a:prstGeom prst="rect">
@@ -4862,63 +6015,15 @@
               <a:buNone/>
             </a:pPr>
             <a:r>
-              <a:rPr lang="en-US" sz="1200" dirty="0">
-                <a:solidFill>
-                  <a:srgbClr val="1C2833"/>
-                </a:solidFill>
-                <a:latin typeface="Arial" pitchFamily="34" charset="0"/>
-                <a:ea typeface="Arial" pitchFamily="34" charset="-122"/>
-                <a:cs typeface="Arial" pitchFamily="34" charset="-120"/>
-              </a:rPr>
-              <a:t>If samples available: tiny sample of each taste, one at a time. Note the sensation. Note what dosha it would affect.</a:t>
-            </a:r>
-            <a:endParaRPr lang="en-US" sz="1200" dirty="0"/>
-          </a:p>
-        </p:txBody>
-      </p:sp>
-      <p:sp>
-        <p:nvSpPr>
-          <p:cNvPr id="5" name="Text 3"/>
-          <p:cNvSpPr/>
-          <p:nvPr/>
-        </p:nvSpPr>
-        <p:spPr>
-          <a:xfrm>
-            <a:off x="406301" y="1160413"/>
-            <a:ext cx="8498026" cy="213271"/>
-          </a:xfrm>
-          <a:prstGeom prst="rect">
-            <a:avLst/>
-          </a:prstGeom>
-          <a:noFill/>
-          <a:ln/>
-        </p:spPr>
-        <p:txBody>
-          <a:bodyPr wrap="square" lIns="0" tIns="0" rIns="0" bIns="0" rtlCol="0" anchor="t"/>
-          <a:lstStyle/>
-          <a:p>
-            <a:pPr algn="l" indent="0" marL="0">
-              <a:lnSpc>
-                <a:spcPts val="1680"/>
-              </a:lnSpc>
-              <a:spcBef>
-                <a:spcPts val="300"/>
-              </a:spcBef>
-              <a:spcAft>
-                <a:spcPts val="300"/>
-              </a:spcAft>
-              <a:buNone/>
-            </a:pPr>
-            <a:r>
-              <a:rPr lang="en-US" sz="1200" dirty="0">
-                <a:solidFill>
-                  <a:srgbClr val="1C2833"/>
-                </a:solidFill>
-                <a:latin typeface="Arial" pitchFamily="34" charset="0"/>
-                <a:ea typeface="Arial" pitchFamily="34" charset="-122"/>
-                <a:cs typeface="Arial" pitchFamily="34" charset="-120"/>
-              </a:rPr>
-              <a:t>If no samples: students list 3 foods they ate in the last 24 hours and identify which tastes were present + missing.</a:t>
+              <a:rPr lang="en-US" sz="1200" i="1" dirty="0">
+                <a:solidFill>
+                  <a:srgbClr val="1C2833"/>
+                </a:solidFill>
+                <a:latin typeface="Arial" pitchFamily="34" charset="0"/>
+                <a:ea typeface="Arial" pitchFamily="34" charset="-122"/>
+                <a:cs typeface="Arial" pitchFamily="34" charset="-120"/>
+              </a:rPr>
+              <a:t>Each row: Sanskrit · English · Examples · Dosha effect.</a:t>
             </a:r>
             <a:endParaRPr lang="en-US" sz="1200" dirty="0"/>
           </a:p>
@@ -5076,7 +6181,7 @@
                 <a:ea typeface="Georgia" pitchFamily="34" charset="-122"/>
                 <a:cs typeface="Georgia" pitchFamily="34" charset="-120"/>
               </a:rPr>
-              <a:t>Wrap-up (5 min)</a:t>
+              <a:t>Core (25 min) (cont.)</a:t>
             </a:r>
             <a:endParaRPr lang="en-US" sz="1800" dirty="0"/>
           </a:p>
@@ -5090,8 +6195,8 @@
         </p:nvSpPr>
         <p:spPr>
           <a:xfrm>
-            <a:off x="406301" y="870942"/>
-            <a:ext cx="8498026" cy="213271"/>
+            <a:off x="634901" y="883593"/>
+            <a:ext cx="8102798" cy="1500783"/>
           </a:xfrm>
           <a:prstGeom prst="rect">
             <a:avLst/>
@@ -5103,13 +6208,31 @@
           <a:bodyPr wrap="square" lIns="0" tIns="0" rIns="0" bIns="0" rtlCol="0" anchor="t"/>
           <a:lstStyle/>
           <a:p>
+            <a:pPr algn="l" marL="342900" indent="-342900">
+              <a:lnSpc>
+                <a:spcPts val="1620"/>
+              </a:lnSpc>
+              <a:spcAft>
+                <a:spcPts val="300"/>
+              </a:spcAft>
+              <a:buSzPct val="100000"/>
+              <a:buChar char="•"/>
+            </a:pPr>
+            <a:r>
+              <a:rPr lang="en-US" sz="1200" b="1" dirty="0">
+                <a:solidFill>
+                  <a:srgbClr val="1C2833"/>
+                </a:solidFill>
+                <a:latin typeface="Arial" pitchFamily="34" charset="0"/>
+                <a:ea typeface="Arial" pitchFamily="34" charset="-122"/>
+                <a:cs typeface="Arial" pitchFamily="34" charset="-120"/>
+              </a:rPr>
+              <a:t>Madhura</a:t>
+            </a:r>
             <a:pPr algn="l" indent="0" marL="0">
               <a:lnSpc>
-                <a:spcPts val="1680"/>
-              </a:lnSpc>
-              <a:spcBef>
-                <a:spcPts val="300"/>
-              </a:spcBef>
+                <a:spcPts val="1620"/>
+              </a:lnSpc>
               <a:spcAft>
                 <a:spcPts val="300"/>
               </a:spcAft>
@@ -5124,30 +6247,227 @@
                 <a:ea typeface="Arial" pitchFamily="34" charset="-122"/>
                 <a:cs typeface="Arial" pitchFamily="34" charset="-120"/>
               </a:rPr>
-              <a:t>– Preview Day 7: </a:t>
+              <a:t> — Sweet · Rice, milk, sugar, fruit · ↓ Vāta, ↓ Pitta, ↑ Kapha</a:t>
+            </a:r>
+            <a:endParaRPr lang="en-US" sz="1200" dirty="0"/>
+          </a:p>
+          <a:p>
+            <a:pPr algn="l" marL="342900" indent="-342900">
+              <a:lnSpc>
+                <a:spcPts val="1620"/>
+              </a:lnSpc>
+              <a:spcAft>
+                <a:spcPts val="300"/>
+              </a:spcAft>
+              <a:buSzPct val="100000"/>
+              <a:buChar char="•"/>
+            </a:pPr>
+            <a:r>
+              <a:rPr lang="en-US" sz="1200" b="1" dirty="0">
+                <a:solidFill>
+                  <a:srgbClr val="1C2833"/>
+                </a:solidFill>
+                <a:latin typeface="Arial" pitchFamily="34" charset="0"/>
+                <a:ea typeface="Arial" pitchFamily="34" charset="-122"/>
+                <a:cs typeface="Arial" pitchFamily="34" charset="-120"/>
+              </a:rPr>
+              <a:t>Amla</a:t>
             </a:r>
             <a:pPr algn="l" indent="0" marL="0">
               <a:lnSpc>
-                <a:spcPts val="1680"/>
-              </a:lnSpc>
-              <a:spcBef>
-                <a:spcPts val="300"/>
-              </a:spcBef>
-              <a:spcAft>
-                <a:spcPts val="300"/>
-              </a:spcAft>
-              <a:buNone/>
-            </a:pPr>
-            <a:r>
-              <a:rPr lang="en-US" sz="1200" i="1" dirty="0">
-                <a:solidFill>
-                  <a:srgbClr val="1C2833"/>
-                </a:solidFill>
-                <a:latin typeface="Arial" pitchFamily="34" charset="0"/>
-                <a:ea typeface="Arial" pitchFamily="34" charset="-122"/>
-                <a:cs typeface="Arial" pitchFamily="34" charset="-120"/>
-              </a:rPr>
-              <a:t>"Tomorrow — primary source. BG 6.17."</a:t>
+                <a:spcPts val="1620"/>
+              </a:lnSpc>
+              <a:spcAft>
+                <a:spcPts val="300"/>
+              </a:spcAft>
+              <a:buNone/>
+            </a:pPr>
+            <a:r>
+              <a:rPr lang="en-US" sz="1200" dirty="0">
+                <a:solidFill>
+                  <a:srgbClr val="1C2833"/>
+                </a:solidFill>
+                <a:latin typeface="Arial" pitchFamily="34" charset="0"/>
+                <a:ea typeface="Arial" pitchFamily="34" charset="-122"/>
+                <a:cs typeface="Arial" pitchFamily="34" charset="-120"/>
+              </a:rPr>
+              <a:t> — Sour · Citrus, yogurt, vinegar · ↓ Vāta, ↑ Pitta, ↑ Kapha</a:t>
+            </a:r>
+            <a:endParaRPr lang="en-US" sz="1200" dirty="0"/>
+          </a:p>
+          <a:p>
+            <a:pPr algn="l" marL="342900" indent="-342900">
+              <a:lnSpc>
+                <a:spcPts val="1620"/>
+              </a:lnSpc>
+              <a:spcAft>
+                <a:spcPts val="300"/>
+              </a:spcAft>
+              <a:buSzPct val="100000"/>
+              <a:buChar char="•"/>
+            </a:pPr>
+            <a:r>
+              <a:rPr lang="en-US" sz="1200" b="1" dirty="0">
+                <a:solidFill>
+                  <a:srgbClr val="1C2833"/>
+                </a:solidFill>
+                <a:latin typeface="Arial" pitchFamily="34" charset="0"/>
+                <a:ea typeface="Arial" pitchFamily="34" charset="-122"/>
+                <a:cs typeface="Arial" pitchFamily="34" charset="-120"/>
+              </a:rPr>
+              <a:t>Lavaṇa</a:t>
+            </a:r>
+            <a:pPr algn="l" indent="0" marL="0">
+              <a:lnSpc>
+                <a:spcPts val="1620"/>
+              </a:lnSpc>
+              <a:spcAft>
+                <a:spcPts val="300"/>
+              </a:spcAft>
+              <a:buNone/>
+            </a:pPr>
+            <a:r>
+              <a:rPr lang="en-US" sz="1200" dirty="0">
+                <a:solidFill>
+                  <a:srgbClr val="1C2833"/>
+                </a:solidFill>
+                <a:latin typeface="Arial" pitchFamily="34" charset="0"/>
+                <a:ea typeface="Arial" pitchFamily="34" charset="-122"/>
+                <a:cs typeface="Arial" pitchFamily="34" charset="-120"/>
+              </a:rPr>
+              <a:t> — Salty · Salt, sea vegetables · ↓ Vāta, ↑ Pitta, ↑ Kapha</a:t>
+            </a:r>
+            <a:endParaRPr lang="en-US" sz="1200" dirty="0"/>
+          </a:p>
+          <a:p>
+            <a:pPr algn="l" marL="342900" indent="-342900">
+              <a:lnSpc>
+                <a:spcPts val="1620"/>
+              </a:lnSpc>
+              <a:spcAft>
+                <a:spcPts val="300"/>
+              </a:spcAft>
+              <a:buSzPct val="100000"/>
+              <a:buChar char="•"/>
+            </a:pPr>
+            <a:r>
+              <a:rPr lang="en-US" sz="1200" b="1" dirty="0">
+                <a:solidFill>
+                  <a:srgbClr val="1C2833"/>
+                </a:solidFill>
+                <a:latin typeface="Arial" pitchFamily="34" charset="0"/>
+                <a:ea typeface="Arial" pitchFamily="34" charset="-122"/>
+                <a:cs typeface="Arial" pitchFamily="34" charset="-120"/>
+              </a:rPr>
+              <a:t>Kaṭu</a:t>
+            </a:r>
+            <a:pPr algn="l" indent="0" marL="0">
+              <a:lnSpc>
+                <a:spcPts val="1620"/>
+              </a:lnSpc>
+              <a:spcAft>
+                <a:spcPts val="300"/>
+              </a:spcAft>
+              <a:buNone/>
+            </a:pPr>
+            <a:r>
+              <a:rPr lang="en-US" sz="1200" dirty="0">
+                <a:solidFill>
+                  <a:srgbClr val="1C2833"/>
+                </a:solidFill>
+                <a:latin typeface="Arial" pitchFamily="34" charset="0"/>
+                <a:ea typeface="Arial" pitchFamily="34" charset="-122"/>
+                <a:cs typeface="Arial" pitchFamily="34" charset="-120"/>
+              </a:rPr>
+              <a:t> — Pungent · Chili, ginger, garlic · ↑ Vāta, ↑ Pitta, ↓ Kapha</a:t>
+            </a:r>
+            <a:endParaRPr lang="en-US" sz="1200" dirty="0"/>
+          </a:p>
+          <a:p>
+            <a:pPr algn="l" marL="342900" indent="-342900">
+              <a:lnSpc>
+                <a:spcPts val="1620"/>
+              </a:lnSpc>
+              <a:spcAft>
+                <a:spcPts val="300"/>
+              </a:spcAft>
+              <a:buSzPct val="100000"/>
+              <a:buChar char="•"/>
+            </a:pPr>
+            <a:r>
+              <a:rPr lang="en-US" sz="1200" b="1" dirty="0">
+                <a:solidFill>
+                  <a:srgbClr val="1C2833"/>
+                </a:solidFill>
+                <a:latin typeface="Arial" pitchFamily="34" charset="0"/>
+                <a:ea typeface="Arial" pitchFamily="34" charset="-122"/>
+                <a:cs typeface="Arial" pitchFamily="34" charset="-120"/>
+              </a:rPr>
+              <a:t>Tikta</a:t>
+            </a:r>
+            <a:pPr algn="l" indent="0" marL="0">
+              <a:lnSpc>
+                <a:spcPts val="1620"/>
+              </a:lnSpc>
+              <a:spcAft>
+                <a:spcPts val="300"/>
+              </a:spcAft>
+              <a:buNone/>
+            </a:pPr>
+            <a:r>
+              <a:rPr lang="en-US" sz="1200" dirty="0">
+                <a:solidFill>
+                  <a:srgbClr val="1C2833"/>
+                </a:solidFill>
+                <a:latin typeface="Arial" pitchFamily="34" charset="0"/>
+                <a:ea typeface="Arial" pitchFamily="34" charset="-122"/>
+                <a:cs typeface="Arial" pitchFamily="34" charset="-120"/>
+              </a:rPr>
+              <a:t> — Bitter · Bitter gourd, turmeric, neem · ↑ Vāta, ↓ Pitta, ↓ Kapha</a:t>
+            </a:r>
+            <a:endParaRPr lang="en-US" sz="1200" dirty="0"/>
+          </a:p>
+          <a:p>
+            <a:pPr algn="l" marL="342900" indent="-342900">
+              <a:lnSpc>
+                <a:spcPts val="1620"/>
+              </a:lnSpc>
+              <a:spcAft>
+                <a:spcPts val="300"/>
+              </a:spcAft>
+              <a:buSzPct val="100000"/>
+              <a:buChar char="•"/>
+            </a:pPr>
+            <a:r>
+              <a:rPr lang="en-US" sz="1200" b="1" dirty="0">
+                <a:solidFill>
+                  <a:srgbClr val="1C2833"/>
+                </a:solidFill>
+                <a:latin typeface="Arial" pitchFamily="34" charset="0"/>
+                <a:ea typeface="Arial" pitchFamily="34" charset="-122"/>
+                <a:cs typeface="Arial" pitchFamily="34" charset="-120"/>
+              </a:rPr>
+              <a:t>Kaṣāya</a:t>
+            </a:r>
+            <a:pPr algn="l" indent="0" marL="0">
+              <a:lnSpc>
+                <a:spcPts val="1620"/>
+              </a:lnSpc>
+              <a:spcAft>
+                <a:spcPts val="300"/>
+              </a:spcAft>
+              <a:buNone/>
+            </a:pPr>
+            <a:r>
+              <a:rPr lang="en-US" sz="1200" dirty="0">
+                <a:solidFill>
+                  <a:srgbClr val="1C2833"/>
+                </a:solidFill>
+                <a:latin typeface="Arial" pitchFamily="34" charset="0"/>
+                <a:ea typeface="Arial" pitchFamily="34" charset="-122"/>
+                <a:cs typeface="Arial" pitchFamily="34" charset="-120"/>
+              </a:rPr>
+              <a:t> — Astringent · Banana (unripe), pomegranate, beans · ↑ Vāta, ↓ Pitta, ↓ Kapha</a:t>
             </a:r>
             <a:endParaRPr lang="en-US" sz="1200" dirty="0"/>
           </a:p>
@@ -5305,7 +6625,7 @@
                 <a:ea typeface="Georgia" pitchFamily="34" charset="-122"/>
                 <a:cs typeface="Georgia" pitchFamily="34" charset="-120"/>
               </a:rPr>
-              <a:t>Homework</a:t>
+              <a:t>Core (25 min) (cont.)</a:t>
             </a:r>
             <a:endParaRPr lang="en-US" sz="1800" dirty="0"/>
           </a:p>
@@ -5319,8 +6639,8 @@
         </p:nvSpPr>
         <p:spPr>
           <a:xfrm>
-            <a:off x="406301" y="870942"/>
-            <a:ext cx="8498026" cy="213271"/>
+            <a:off x="634901" y="883593"/>
+            <a:ext cx="8102798" cy="487561"/>
           </a:xfrm>
           <a:prstGeom prst="rect">
             <a:avLst/>
@@ -5332,13 +6652,31 @@
           <a:bodyPr wrap="square" lIns="0" tIns="0" rIns="0" bIns="0" rtlCol="0" anchor="t"/>
           <a:lstStyle/>
           <a:p>
+            <a:pPr algn="l" marL="342900" indent="-342900">
+              <a:lnSpc>
+                <a:spcPts val="1620"/>
+              </a:lnSpc>
+              <a:spcAft>
+                <a:spcPts val="300"/>
+              </a:spcAft>
+              <a:buSzPct val="100000"/>
+              <a:buChar char="•"/>
+            </a:pPr>
+            <a:r>
+              <a:rPr lang="en-US" sz="1200" b="1" dirty="0">
+                <a:solidFill>
+                  <a:srgbClr val="1C2833"/>
+                </a:solidFill>
+                <a:latin typeface="Arial" pitchFamily="34" charset="0"/>
+                <a:ea typeface="Arial" pitchFamily="34" charset="-122"/>
+                <a:cs typeface="Arial" pitchFamily="34" charset="-120"/>
+              </a:rPr>
+              <a:t>The principle:</a:t>
+            </a:r>
             <a:pPr algn="l" indent="0" marL="0">
               <a:lnSpc>
-                <a:spcPts val="1680"/>
-              </a:lnSpc>
-              <a:spcBef>
-                <a:spcPts val="300"/>
-              </a:spcBef>
+                <a:spcPts val="1620"/>
+              </a:lnSpc>
               <a:spcAft>
                 <a:spcPts val="300"/>
               </a:spcAft>
@@ -5353,7 +6691,7 @@
                 <a:ea typeface="Arial" pitchFamily="34" charset="-122"/>
                 <a:cs typeface="Arial" pitchFamily="34" charset="-120"/>
               </a:rPr>
-              <a:t>– For tomorrow's meals, count how many of the six tastes you include. Aim for at least 4.</a:t>
+              <a:t> a balanced meal includes ALL six tastes. Traditional Indian thalis are designed this way — you'll notice rice (sweet), pickle (sour/salty), chili (pungent), bitter gourd or fenugreek (bitter), and a pulse-based dish (astringent).</a:t>
             </a:r>
             <a:endParaRPr lang="en-US" sz="1200" dirty="0"/>
           </a:p>
